--- a/docs/ascend-infer-stack.pptx
+++ b/docs/ascend-infer-stack.pptx
@@ -502,7 +502,7 @@
           <a:lstStyle/>
           <a:p>
             <a:r>
-              <a:t>依据 MindIE 3.1 用户手册 Overview 与 MindIE Motor 3.1 架构说明。MindIE LLM 进入维护，官方建议新部署使用 MindIE Motor 加 vLLM-Ascend。MindIE LLM 自上而下为 Server、LLM Manager、Text Generator、Modeling。LLM Manager 内的 Engine 编排 Scheduler、Executor 和 Worker；Block Manager 管 KV 池。Executor 把调度结果下发给 Text Generator，覆盖跨节点、跨设备。Text Generator 含前处理、Generator、Sampler，并支持可插拔的并行解码。Modeling 提供 ATB Models；开发者架构说明同时支持 ACLGraph 和 ATBGraph。Motor：Coordinator 为数据面入口；Controller 与 NodeManager 为管控面；EngineServer 北向接二者，南向当前仅 vLLM。架构页写明南向接口包括 vLLM、SGLang 和 MindIE，当前版本只支持 vLLM。MindCluster 提供 Kubernetes、PD 分离 CRD 和 Operator，位于调用链外侧。CCAE 可选。CANN 组成沿用方案概述：AscendCL、GE、Runtime、算子库、HCCL、DVPP。推理运行包为 NNRT。</a:t>
+              <a:t>依据 MindIE 3.1 用户手册 Overview 与 MindIE Motor 3.1 架构说明。MindIE LLM 进入维护，官方建议新部署使用 MindIE Motor 加 vLLM-Ascend。MindIE LLM 自上而下为 Server、LLM Manager、Text Generator、Modeling。LLM Manager 内的 Engine 编排 Scheduler、Executor 和 Worker；Block Manager 管 KV 池。Executor 把调度结果下发给 Text Generator，覆盖跨节点、跨设备。Text Generator 含前处理、Generator、Sampler，并支持可插拔的并行解码。Modeling 提供 ATB Models；开发者架构说明同时支持 ACLGraph 和 ATBGraph。Motor：Coordinator 为数据面入口；Controller 与 NodeManager 为管控面；EngineServer 北向接二者，南向当前仅 vLLM。架构页写明南向接口包括 vLLM、SGLang 和 MindIE，当前版本只支持 vLLM。MindCluster 提供 Kubernetes、PD 分离 CRD 和 Operator，位于调用链外侧。CCAE 可选。CANN 组成沿用方案概述：AscendCL、GE、Runtime、算子库、HCCL、DVPP。推理运行包为 NNRT。KV：MindIE LLM 的 Block Manager 管 DP 内 KV，kv connector 对接池化后端，Mooncake 是其中一种 backend。Motor 的亲和调度依赖 Mooncake Conductor：P 实例用 ZMQ 发布 KV 事件，Coordinator 按位置调度。3.1 中文页写优先送到已缓存该 KV 的 D 实例；英文页写优先送到已有前缀 KV 的 P 实例。图上只写按位置调度。Motor 的 KV 池基于 vLLM-Ascend：MultiConnector 把 MooncakeConnector 与 AscendStoreConnector 组合。Mooncake Store 由 mooncake_master 管理；另一后端是 MemCache。Conductor 设计里还可接 YuanRong。共享池推入可以使用按层 connector。亲和调度文档建议此时不要再按层单独传输，由 Conductor 管全局位置。</a:t>
             </a:r>
           </a:p>
         </p:txBody>
@@ -3873,8 +3873,8 @@
         </p:nvSpPr>
         <p:spPr>
           <a:xfrm>
-            <a:off x="256032" y="1700784"/>
-            <a:ext cx="841248" cy="2944368"/>
+            <a:off x="256032" y="1645920"/>
+            <a:ext cx="841248" cy="2468880"/>
           </a:xfrm>
           <a:prstGeom prst="rect">
             <a:avLst/>
@@ -3915,8 +3915,8 @@
         </p:nvSpPr>
         <p:spPr>
           <a:xfrm>
-            <a:off x="1133856" y="1700784"/>
-            <a:ext cx="5321808" cy="2944368"/>
+            <a:off x="1133856" y="1645920"/>
+            <a:ext cx="5321808" cy="2468880"/>
           </a:xfrm>
           <a:prstGeom prst="rect">
             <a:avLst/>
@@ -3960,7 +3960,7 @@
         </p:nvSpPr>
         <p:spPr>
           <a:xfrm>
-            <a:off x="1133856" y="1700784"/>
+            <a:off x="1133856" y="1645920"/>
             <a:ext cx="5321808" cy="310896"/>
           </a:xfrm>
           <a:prstGeom prst="rect">
@@ -4021,8 +4021,8 @@
         </p:nvSpPr>
         <p:spPr>
           <a:xfrm>
-            <a:off x="1207008" y="2084832"/>
-            <a:ext cx="1627632" cy="580644"/>
+            <a:off x="1207008" y="2029968"/>
+            <a:ext cx="1627632" cy="461772"/>
           </a:xfrm>
           <a:prstGeom prst="rect">
             <a:avLst/>
@@ -4082,8 +4082,8 @@
         </p:nvSpPr>
         <p:spPr>
           <a:xfrm>
-            <a:off x="2834640" y="2084832"/>
-            <a:ext cx="3547872" cy="580644"/>
+            <a:off x="2834640" y="2029968"/>
+            <a:ext cx="3547872" cy="461772"/>
           </a:xfrm>
           <a:prstGeom prst="rect">
             <a:avLst/>
@@ -4125,8 +4125,8 @@
         </p:nvSpPr>
         <p:spPr>
           <a:xfrm>
-            <a:off x="2926080" y="2084832"/>
-            <a:ext cx="3419856" cy="580644"/>
+            <a:off x="2926080" y="2029968"/>
+            <a:ext cx="3419856" cy="461772"/>
           </a:xfrm>
           <a:prstGeom prst="rect">
             <a:avLst/>
@@ -4154,7 +4154,7 @@
                 <a:ea typeface="Microsoft YaHei"/>
                 <a:cs typeface="Microsoft YaHei"/>
               </a:rPr>
-              <a:t>服务入口。Endpoint 兼容 OpenAI、vLLM、Triton、TGI。</a:t>
+              <a:t>Endpoint 兼容 OpenAI、vLLM、Triton、TGI。</a:t>
             </a:r>
           </a:p>
         </p:txBody>
@@ -4167,8 +4167,8 @@
         </p:nvSpPr>
         <p:spPr>
           <a:xfrm>
-            <a:off x="1207008" y="2720340"/>
-            <a:ext cx="1627632" cy="580644"/>
+            <a:off x="1207008" y="2546604"/>
+            <a:ext cx="1627632" cy="461772"/>
           </a:xfrm>
           <a:prstGeom prst="rect">
             <a:avLst/>
@@ -4228,8 +4228,8 @@
         </p:nvSpPr>
         <p:spPr>
           <a:xfrm>
-            <a:off x="2834640" y="2720340"/>
-            <a:ext cx="3547872" cy="580644"/>
+            <a:off x="2834640" y="2546604"/>
+            <a:ext cx="3547872" cy="461772"/>
           </a:xfrm>
           <a:prstGeom prst="rect">
             <a:avLst/>
@@ -4271,8 +4271,8 @@
         </p:nvSpPr>
         <p:spPr>
           <a:xfrm>
-            <a:off x="2926080" y="2720340"/>
-            <a:ext cx="3419856" cy="580644"/>
+            <a:off x="2926080" y="2546604"/>
+            <a:ext cx="3419856" cy="461772"/>
           </a:xfrm>
           <a:prstGeom prst="rect">
             <a:avLst/>
@@ -4300,7 +4300,7 @@
                 <a:ea typeface="Microsoft YaHei"/>
                 <a:cs typeface="Microsoft YaHei"/>
               </a:rPr>
-              <a:t>请求调度与 KV 池。Engine 内含 Scheduler、Block Manager。</a:t>
+              <a:t>连续组批。Engine 内含 Scheduler。</a:t>
             </a:r>
           </a:p>
         </p:txBody>
@@ -4313,8 +4313,8 @@
         </p:nvSpPr>
         <p:spPr>
           <a:xfrm>
-            <a:off x="1207008" y="3355848"/>
-            <a:ext cx="1627632" cy="580644"/>
+            <a:off x="1207008" y="3063240"/>
+            <a:ext cx="1627632" cy="461772"/>
           </a:xfrm>
           <a:prstGeom prst="rect">
             <a:avLst/>
@@ -4374,8 +4374,8 @@
         </p:nvSpPr>
         <p:spPr>
           <a:xfrm>
-            <a:off x="2834640" y="3355848"/>
-            <a:ext cx="3547872" cy="580644"/>
+            <a:off x="2834640" y="3063240"/>
+            <a:ext cx="3547872" cy="461772"/>
           </a:xfrm>
           <a:prstGeom prst="rect">
             <a:avLst/>
@@ -4417,8 +4417,8 @@
         </p:nvSpPr>
         <p:spPr>
           <a:xfrm>
-            <a:off x="2926080" y="3355848"/>
-            <a:ext cx="3419856" cy="580644"/>
+            <a:off x="2926080" y="3063240"/>
+            <a:ext cx="3419856" cy="461772"/>
           </a:xfrm>
           <a:prstGeom prst="rect">
             <a:avLst/>
@@ -4446,7 +4446,7 @@
                 <a:ea typeface="Microsoft YaHei"/>
                 <a:cs typeface="Microsoft YaHei"/>
               </a:rPr>
-              <a:t>前处理、自回归、后处理。Executor 负责跨节点下发。</a:t>
+              <a:t>自回归执行。Executor 负责跨节点下发。</a:t>
             </a:r>
           </a:p>
         </p:txBody>
@@ -4459,8 +4459,8 @@
         </p:nvSpPr>
         <p:spPr>
           <a:xfrm>
-            <a:off x="1207008" y="3991356"/>
-            <a:ext cx="1627632" cy="580644"/>
+            <a:off x="1207008" y="3579876"/>
+            <a:ext cx="1627632" cy="461772"/>
           </a:xfrm>
           <a:prstGeom prst="rect">
             <a:avLst/>
@@ -4520,8 +4520,8 @@
         </p:nvSpPr>
         <p:spPr>
           <a:xfrm>
-            <a:off x="2834640" y="3991356"/>
-            <a:ext cx="3547872" cy="580644"/>
+            <a:off x="2834640" y="3579876"/>
+            <a:ext cx="3547872" cy="461772"/>
           </a:xfrm>
           <a:prstGeom prst="rect">
             <a:avLst/>
@@ -4563,8 +4563,8 @@
         </p:nvSpPr>
         <p:spPr>
           <a:xfrm>
-            <a:off x="2926080" y="3991356"/>
-            <a:ext cx="3419856" cy="580644"/>
+            <a:off x="2926080" y="3579876"/>
+            <a:ext cx="3419856" cy="461772"/>
           </a:xfrm>
           <a:prstGeom prst="rect">
             <a:avLst/>
@@ -4592,7 +4592,7 @@
                 <a:ea typeface="Microsoft YaHei"/>
                 <a:cs typeface="Microsoft YaHei"/>
               </a:rPr>
-              <a:t>ATB 模型与图执行。后端为 ACLGraph 和 ATBGraph。</a:t>
+              <a:t>ACLGraph 与 ATBGraph。</a:t>
             </a:r>
           </a:p>
         </p:txBody>
@@ -4605,8 +4605,8 @@
         </p:nvSpPr>
         <p:spPr>
           <a:xfrm>
-            <a:off x="6565392" y="1700784"/>
-            <a:ext cx="5321808" cy="2944368"/>
+            <a:off x="6565392" y="1645920"/>
+            <a:ext cx="5321808" cy="2468880"/>
           </a:xfrm>
           <a:prstGeom prst="rect">
             <a:avLst/>
@@ -4650,7 +4650,7 @@
         </p:nvSpPr>
         <p:spPr>
           <a:xfrm>
-            <a:off x="6565392" y="1700784"/>
+            <a:off x="6565392" y="1645920"/>
             <a:ext cx="5321808" cy="310896"/>
           </a:xfrm>
           <a:prstGeom prst="rect">
@@ -4711,8 +4711,8 @@
         </p:nvSpPr>
         <p:spPr>
           <a:xfrm>
-            <a:off x="6638544" y="2084832"/>
-            <a:ext cx="1627632" cy="580644"/>
+            <a:off x="6638544" y="2029968"/>
+            <a:ext cx="1627632" cy="461772"/>
           </a:xfrm>
           <a:prstGeom prst="rect">
             <a:avLst/>
@@ -4772,8 +4772,8 @@
         </p:nvSpPr>
         <p:spPr>
           <a:xfrm>
-            <a:off x="8266176" y="2084832"/>
-            <a:ext cx="3547872" cy="580644"/>
+            <a:off x="8266176" y="2029968"/>
+            <a:ext cx="3547872" cy="461772"/>
           </a:xfrm>
           <a:prstGeom prst="rect">
             <a:avLst/>
@@ -4815,8 +4815,8 @@
         </p:nvSpPr>
         <p:spPr>
           <a:xfrm>
-            <a:off x="8357616" y="2084832"/>
-            <a:ext cx="3419856" cy="580644"/>
+            <a:off x="8357616" y="2029968"/>
+            <a:ext cx="3419856" cy="461772"/>
           </a:xfrm>
           <a:prstGeom prst="rect">
             <a:avLst/>
@@ -4844,7 +4844,7 @@
                 <a:ea typeface="Microsoft YaHei"/>
                 <a:cs typeface="Microsoft YaHei"/>
               </a:rPr>
-              <a:t>数据面入口。路由、限流、实例隔离。</a:t>
+              <a:t>路由、限流、实例隔离。</a:t>
             </a:r>
           </a:p>
         </p:txBody>
@@ -4857,8 +4857,8 @@
         </p:nvSpPr>
         <p:spPr>
           <a:xfrm>
-            <a:off x="6638544" y="2720340"/>
-            <a:ext cx="1627632" cy="580644"/>
+            <a:off x="6638544" y="2546604"/>
+            <a:ext cx="1627632" cy="461772"/>
           </a:xfrm>
           <a:prstGeom prst="rect">
             <a:avLst/>
@@ -4918,8 +4918,8 @@
         </p:nvSpPr>
         <p:spPr>
           <a:xfrm>
-            <a:off x="8266176" y="2720340"/>
-            <a:ext cx="3547872" cy="580644"/>
+            <a:off x="8266176" y="2546604"/>
+            <a:ext cx="3547872" cy="461772"/>
           </a:xfrm>
           <a:prstGeom prst="rect">
             <a:avLst/>
@@ -4961,8 +4961,8 @@
         </p:nvSpPr>
         <p:spPr>
           <a:xfrm>
-            <a:off x="8357616" y="2720340"/>
-            <a:ext cx="3419856" cy="580644"/>
+            <a:off x="8357616" y="2546604"/>
+            <a:ext cx="3419856" cy="461772"/>
           </a:xfrm>
           <a:prstGeom prst="rect">
             <a:avLst/>
@@ -4990,7 +4990,7 @@
                 <a:ea typeface="Microsoft YaHei"/>
                 <a:cs typeface="Microsoft YaHei"/>
               </a:rPr>
-              <a:t>Controller 管 P/D 身份和故障。NodeManager 拉起节点并上报心跳。</a:t>
+              <a:t>Controller 与 NodeManager。</a:t>
             </a:r>
           </a:p>
         </p:txBody>
@@ -5003,8 +5003,8 @@
         </p:nvSpPr>
         <p:spPr>
           <a:xfrm>
-            <a:off x="6638544" y="3355848"/>
-            <a:ext cx="1627632" cy="580644"/>
+            <a:off x="6638544" y="3063240"/>
+            <a:ext cx="1627632" cy="461772"/>
           </a:xfrm>
           <a:prstGeom prst="rect">
             <a:avLst/>
@@ -5064,8 +5064,8 @@
         </p:nvSpPr>
         <p:spPr>
           <a:xfrm>
-            <a:off x="8266176" y="3355848"/>
-            <a:ext cx="3547872" cy="580644"/>
+            <a:off x="8266176" y="3063240"/>
+            <a:ext cx="3547872" cy="461772"/>
           </a:xfrm>
           <a:prstGeom prst="rect">
             <a:avLst/>
@@ -5107,8 +5107,8 @@
         </p:nvSpPr>
         <p:spPr>
           <a:xfrm>
-            <a:off x="8357616" y="3355848"/>
-            <a:ext cx="3419856" cy="580644"/>
+            <a:off x="8357616" y="3063240"/>
+            <a:ext cx="3419856" cy="461772"/>
           </a:xfrm>
           <a:prstGeom prst="rect">
             <a:avLst/>
@@ -5136,7 +5136,7 @@
                 <a:ea typeface="Microsoft YaHei"/>
                 <a:cs typeface="Microsoft YaHei"/>
               </a:rPr>
-              <a:t>节点入口。北向接 Coordinator 和 Controller。</a:t>
+              <a:t>北向接 Coordinator 和 Controller。</a:t>
             </a:r>
           </a:p>
         </p:txBody>
@@ -5149,8 +5149,8 @@
         </p:nvSpPr>
         <p:spPr>
           <a:xfrm>
-            <a:off x="6638544" y="3991356"/>
-            <a:ext cx="1627632" cy="580644"/>
+            <a:off x="6638544" y="3579876"/>
+            <a:ext cx="1627632" cy="461772"/>
           </a:xfrm>
           <a:prstGeom prst="rect">
             <a:avLst/>
@@ -5210,8 +5210,8 @@
         </p:nvSpPr>
         <p:spPr>
           <a:xfrm>
-            <a:off x="8266176" y="3991356"/>
-            <a:ext cx="3547872" cy="580644"/>
+            <a:off x="8266176" y="3579876"/>
+            <a:ext cx="3547872" cy="461772"/>
           </a:xfrm>
           <a:prstGeom prst="rect">
             <a:avLst/>
@@ -5253,8 +5253,8 @@
         </p:nvSpPr>
         <p:spPr>
           <a:xfrm>
-            <a:off x="8357616" y="3991356"/>
-            <a:ext cx="3419856" cy="580644"/>
+            <a:off x="8357616" y="3579876"/>
+            <a:ext cx="3419856" cy="461772"/>
           </a:xfrm>
           <a:prstGeom prst="rect">
             <a:avLst/>
@@ -5282,7 +5282,7 @@
                 <a:ea typeface="Microsoft YaHei"/>
                 <a:cs typeface="Microsoft YaHei"/>
               </a:rPr>
-              <a:t>当前版本唯一南向引擎。前向和实例内组批在这里。</a:t>
+              <a:t>当前唯一南向。前向和实例内组批。</a:t>
             </a:r>
           </a:p>
         </p:txBody>
@@ -5295,8 +5295,431 @@
         </p:nvSpPr>
         <p:spPr>
           <a:xfrm>
-            <a:off x="256032" y="4754880"/>
-            <a:ext cx="841248" cy="512064"/>
+            <a:off x="256032" y="4206240"/>
+            <a:ext cx="841248" cy="658368"/>
+          </a:xfrm>
+          <a:prstGeom prst="rect">
+            <a:avLst/>
+          </a:prstGeom>
+          <a:noFill/>
+        </p:spPr>
+        <p:txBody>
+          <a:bodyPr wrap="square" lIns="0" rIns="0" tIns="0" bIns="0" anchor="ctr"/>
+          <a:lstStyle/>
+          <a:p>
+            <a:pPr algn="l">
+              <a:spcBef>
+                <a:spcPts val="0"/>
+              </a:spcBef>
+              <a:spcAft>
+                <a:spcPts val="0"/>
+              </a:spcAft>
+            </a:pPr>
+            <a:r>
+              <a:rPr sz="1300" b="1">
+                <a:solidFill>
+                  <a:srgbClr val="0E7A76"/>
+                </a:solidFill>
+                <a:latin typeface="Microsoft YaHei"/>
+                <a:ea typeface="Microsoft YaHei"/>
+                <a:cs typeface="Microsoft YaHei"/>
+              </a:rPr>
+              <a:t>KV</a:t>
+            </a:r>
+          </a:p>
+        </p:txBody>
+      </p:sp>
+      <p:sp>
+        <p:nvSpPr>
+          <p:cNvPr id="40" name="Rectangle 39"/>
+          <p:cNvSpPr/>
+          <p:nvPr/>
+        </p:nvSpPr>
+        <p:spPr>
+          <a:xfrm>
+            <a:off x="1133856" y="4206240"/>
+            <a:ext cx="3535680" cy="658368"/>
+          </a:xfrm>
+          <a:prstGeom prst="rect">
+            <a:avLst/>
+          </a:prstGeom>
+          <a:solidFill>
+            <a:srgbClr val="0E7A76"/>
+          </a:solidFill>
+          <a:ln>
+            <a:noFill/>
+          </a:ln>
+        </p:spPr>
+        <p:style>
+          <a:lnRef idx="1">
+            <a:schemeClr val="accent1"/>
+          </a:lnRef>
+          <a:fillRef idx="3">
+            <a:schemeClr val="accent1"/>
+          </a:fillRef>
+          <a:effectRef idx="2">
+            <a:schemeClr val="accent1"/>
+          </a:effectRef>
+          <a:fontRef idx="minor">
+            <a:schemeClr val="lt1"/>
+          </a:fontRef>
+        </p:style>
+        <p:txBody>
+          <a:bodyPr rtlCol="0" anchor="ctr"/>
+          <a:lstStyle/>
+          <a:p>
+            <a:pPr algn="ctr"/>
+          </a:p>
+        </p:txBody>
+      </p:sp>
+      <p:sp>
+        <p:nvSpPr>
+          <p:cNvPr id="41" name="TextBox 40"/>
+          <p:cNvSpPr txBox="1"/>
+          <p:nvPr/>
+        </p:nvSpPr>
+        <p:spPr>
+          <a:xfrm>
+            <a:off x="1225296" y="4261103"/>
+            <a:ext cx="3352800" cy="237744"/>
+          </a:xfrm>
+          <a:prstGeom prst="rect">
+            <a:avLst/>
+          </a:prstGeom>
+          <a:noFill/>
+        </p:spPr>
+        <p:txBody>
+          <a:bodyPr wrap="square" lIns="0" rIns="0" tIns="0" bIns="0" anchor="ctr"/>
+          <a:lstStyle/>
+          <a:p>
+            <a:pPr algn="l">
+              <a:spcBef>
+                <a:spcPts val="0"/>
+              </a:spcBef>
+              <a:spcAft>
+                <a:spcPts val="0"/>
+              </a:spcAft>
+            </a:pPr>
+            <a:r>
+              <a:rPr sz="1400" b="1">
+                <a:solidFill>
+                  <a:srgbClr val="FFFFFF"/>
+                </a:solidFill>
+                <a:latin typeface="Microsoft YaHei"/>
+                <a:ea typeface="Microsoft YaHei"/>
+                <a:cs typeface="Microsoft YaHei"/>
+              </a:rPr>
+              <a:t>实例内 KV</a:t>
+            </a:r>
+          </a:p>
+        </p:txBody>
+      </p:sp>
+      <p:sp>
+        <p:nvSpPr>
+          <p:cNvPr id="42" name="TextBox 41"/>
+          <p:cNvSpPr txBox="1"/>
+          <p:nvPr/>
+        </p:nvSpPr>
+        <p:spPr>
+          <a:xfrm>
+            <a:off x="1225296" y="4498848"/>
+            <a:ext cx="3352800" cy="310896"/>
+          </a:xfrm>
+          <a:prstGeom prst="rect">
+            <a:avLst/>
+          </a:prstGeom>
+          <a:noFill/>
+        </p:spPr>
+        <p:txBody>
+          <a:bodyPr wrap="square" lIns="0" rIns="0" tIns="0" bIns="0" anchor="t"/>
+          <a:lstStyle/>
+          <a:p>
+            <a:pPr algn="l">
+              <a:spcBef>
+                <a:spcPts val="0"/>
+              </a:spcBef>
+              <a:spcAft>
+                <a:spcPts val="0"/>
+              </a:spcAft>
+            </a:pPr>
+            <a:r>
+              <a:rPr sz="1200" b="0">
+                <a:solidFill>
+                  <a:srgbClr val="FFFFFF"/>
+                </a:solidFill>
+                <a:latin typeface="Microsoft YaHei"/>
+                <a:ea typeface="Microsoft YaHei"/>
+                <a:cs typeface="Microsoft YaHei"/>
+              </a:rPr>
+              <a:t>Block Manager，以及 vLLM 的本卡池</a:t>
+            </a:r>
+          </a:p>
+        </p:txBody>
+      </p:sp>
+      <p:sp>
+        <p:nvSpPr>
+          <p:cNvPr id="43" name="Rectangle 42"/>
+          <p:cNvSpPr/>
+          <p:nvPr/>
+        </p:nvSpPr>
+        <p:spPr>
+          <a:xfrm>
+            <a:off x="4742688" y="4206240"/>
+            <a:ext cx="3535680" cy="658368"/>
+          </a:xfrm>
+          <a:prstGeom prst="rect">
+            <a:avLst/>
+          </a:prstGeom>
+          <a:solidFill>
+            <a:srgbClr val="145A96"/>
+          </a:solidFill>
+          <a:ln>
+            <a:noFill/>
+          </a:ln>
+        </p:spPr>
+        <p:style>
+          <a:lnRef idx="1">
+            <a:schemeClr val="accent1"/>
+          </a:lnRef>
+          <a:fillRef idx="3">
+            <a:schemeClr val="accent1"/>
+          </a:fillRef>
+          <a:effectRef idx="2">
+            <a:schemeClr val="accent1"/>
+          </a:effectRef>
+          <a:fontRef idx="minor">
+            <a:schemeClr val="lt1"/>
+          </a:fontRef>
+        </p:style>
+        <p:txBody>
+          <a:bodyPr rtlCol="0" anchor="ctr"/>
+          <a:lstStyle/>
+          <a:p>
+            <a:pPr algn="ctr"/>
+          </a:p>
+        </p:txBody>
+      </p:sp>
+      <p:sp>
+        <p:nvSpPr>
+          <p:cNvPr id="44" name="TextBox 43"/>
+          <p:cNvSpPr txBox="1"/>
+          <p:nvPr/>
+        </p:nvSpPr>
+        <p:spPr>
+          <a:xfrm>
+            <a:off x="4834128" y="4261103"/>
+            <a:ext cx="3352800" cy="237744"/>
+          </a:xfrm>
+          <a:prstGeom prst="rect">
+            <a:avLst/>
+          </a:prstGeom>
+          <a:noFill/>
+        </p:spPr>
+        <p:txBody>
+          <a:bodyPr wrap="square" lIns="0" rIns="0" tIns="0" bIns="0" anchor="ctr"/>
+          <a:lstStyle/>
+          <a:p>
+            <a:pPr algn="l">
+              <a:spcBef>
+                <a:spcPts val="0"/>
+              </a:spcBef>
+              <a:spcAft>
+                <a:spcPts val="0"/>
+              </a:spcAft>
+            </a:pPr>
+            <a:r>
+              <a:rPr sz="1400" b="1">
+                <a:solidFill>
+                  <a:srgbClr val="FFFFFF"/>
+                </a:solidFill>
+                <a:latin typeface="Microsoft YaHei"/>
+                <a:ea typeface="Microsoft YaHei"/>
+                <a:cs typeface="Microsoft YaHei"/>
+              </a:rPr>
+              <a:t>跨实例搬运</a:t>
+            </a:r>
+          </a:p>
+        </p:txBody>
+      </p:sp>
+      <p:sp>
+        <p:nvSpPr>
+          <p:cNvPr id="45" name="TextBox 44"/>
+          <p:cNvSpPr txBox="1"/>
+          <p:nvPr/>
+        </p:nvSpPr>
+        <p:spPr>
+          <a:xfrm>
+            <a:off x="4834128" y="4498848"/>
+            <a:ext cx="3352800" cy="310896"/>
+          </a:xfrm>
+          <a:prstGeom prst="rect">
+            <a:avLst/>
+          </a:prstGeom>
+          <a:noFill/>
+        </p:spPr>
+        <p:txBody>
+          <a:bodyPr wrap="square" lIns="0" rIns="0" tIns="0" bIns="0" anchor="t"/>
+          <a:lstStyle/>
+          <a:p>
+            <a:pPr algn="l">
+              <a:spcBef>
+                <a:spcPts val="0"/>
+              </a:spcBef>
+              <a:spcAft>
+                <a:spcPts val="0"/>
+              </a:spcAft>
+            </a:pPr>
+            <a:r>
+              <a:rPr sz="1200" b="0">
+                <a:solidFill>
+                  <a:srgbClr val="FFFFFF"/>
+                </a:solidFill>
+                <a:latin typeface="Microsoft YaHei"/>
+                <a:ea typeface="Microsoft YaHei"/>
+                <a:cs typeface="Microsoft YaHei"/>
+              </a:rPr>
+              <a:t>kv connector 与 MooncakeConnector</a:t>
+            </a:r>
+          </a:p>
+        </p:txBody>
+      </p:sp>
+      <p:sp>
+        <p:nvSpPr>
+          <p:cNvPr id="46" name="Rectangle 45"/>
+          <p:cNvSpPr/>
+          <p:nvPr/>
+        </p:nvSpPr>
+        <p:spPr>
+          <a:xfrm>
+            <a:off x="8351520" y="4206240"/>
+            <a:ext cx="3535680" cy="658368"/>
+          </a:xfrm>
+          <a:prstGeom prst="rect">
+            <a:avLst/>
+          </a:prstGeom>
+          <a:solidFill>
+            <a:srgbClr val="7A541C"/>
+          </a:solidFill>
+          <a:ln>
+            <a:noFill/>
+          </a:ln>
+        </p:spPr>
+        <p:style>
+          <a:lnRef idx="1">
+            <a:schemeClr val="accent1"/>
+          </a:lnRef>
+          <a:fillRef idx="3">
+            <a:schemeClr val="accent1"/>
+          </a:fillRef>
+          <a:effectRef idx="2">
+            <a:schemeClr val="accent1"/>
+          </a:effectRef>
+          <a:fontRef idx="minor">
+            <a:schemeClr val="lt1"/>
+          </a:fontRef>
+        </p:style>
+        <p:txBody>
+          <a:bodyPr rtlCol="0" anchor="ctr"/>
+          <a:lstStyle/>
+          <a:p>
+            <a:pPr algn="ctr"/>
+          </a:p>
+        </p:txBody>
+      </p:sp>
+      <p:sp>
+        <p:nvSpPr>
+          <p:cNvPr id="47" name="TextBox 46"/>
+          <p:cNvSpPr txBox="1"/>
+          <p:nvPr/>
+        </p:nvSpPr>
+        <p:spPr>
+          <a:xfrm>
+            <a:off x="8442960" y="4261103"/>
+            <a:ext cx="3352800" cy="237744"/>
+          </a:xfrm>
+          <a:prstGeom prst="rect">
+            <a:avLst/>
+          </a:prstGeom>
+          <a:noFill/>
+        </p:spPr>
+        <p:txBody>
+          <a:bodyPr wrap="square" lIns="0" rIns="0" tIns="0" bIns="0" anchor="ctr"/>
+          <a:lstStyle/>
+          <a:p>
+            <a:pPr algn="l">
+              <a:spcBef>
+                <a:spcPts val="0"/>
+              </a:spcBef>
+              <a:spcAft>
+                <a:spcPts val="0"/>
+              </a:spcAft>
+            </a:pPr>
+            <a:r>
+              <a:rPr sz="1400" b="1">
+                <a:solidFill>
+                  <a:srgbClr val="FFFFFF"/>
+                </a:solidFill>
+                <a:latin typeface="Microsoft YaHei"/>
+                <a:ea typeface="Microsoft YaHei"/>
+                <a:cs typeface="Microsoft YaHei"/>
+              </a:rPr>
+              <a:t>Mooncake</a:t>
+            </a:r>
+          </a:p>
+        </p:txBody>
+      </p:sp>
+      <p:sp>
+        <p:nvSpPr>
+          <p:cNvPr id="48" name="TextBox 47"/>
+          <p:cNvSpPr txBox="1"/>
+          <p:nvPr/>
+        </p:nvSpPr>
+        <p:spPr>
+          <a:xfrm>
+            <a:off x="8442960" y="4498848"/>
+            <a:ext cx="3352800" cy="310896"/>
+          </a:xfrm>
+          <a:prstGeom prst="rect">
+            <a:avLst/>
+          </a:prstGeom>
+          <a:noFill/>
+        </p:spPr>
+        <p:txBody>
+          <a:bodyPr wrap="square" lIns="0" rIns="0" tIns="0" bIns="0" anchor="t"/>
+          <a:lstStyle/>
+          <a:p>
+            <a:pPr algn="l">
+              <a:spcBef>
+                <a:spcPts val="0"/>
+              </a:spcBef>
+              <a:spcAft>
+                <a:spcPts val="0"/>
+              </a:spcAft>
+            </a:pPr>
+            <a:r>
+              <a:rPr sz="1200" b="0">
+                <a:solidFill>
+                  <a:srgbClr val="FFFFFF"/>
+                </a:solidFill>
+                <a:latin typeface="Microsoft YaHei"/>
+                <a:ea typeface="Microsoft YaHei"/>
+                <a:cs typeface="Microsoft YaHei"/>
+              </a:rPr>
+              <a:t>Conductor 管位置，Store 做共享池</a:t>
+            </a:r>
+          </a:p>
+        </p:txBody>
+      </p:sp>
+      <p:sp>
+        <p:nvSpPr>
+          <p:cNvPr id="49" name="TextBox 48"/>
+          <p:cNvSpPr txBox="1"/>
+          <p:nvPr/>
+        </p:nvSpPr>
+        <p:spPr>
+          <a:xfrm>
+            <a:off x="256032" y="4956048"/>
+            <a:ext cx="841248" cy="384048"/>
           </a:xfrm>
           <a:prstGeom prst="rect">
             <a:avLst/>
@@ -5331,14 +5754,14 @@
       </p:sp>
       <p:sp>
         <p:nvSpPr>
-          <p:cNvPr id="40" name="Rectangle 39"/>
+          <p:cNvPr id="50" name="Rectangle 49"/>
           <p:cNvSpPr/>
           <p:nvPr/>
         </p:nvSpPr>
         <p:spPr>
           <a:xfrm>
-            <a:off x="1133856" y="4754880"/>
-            <a:ext cx="1554480" cy="512064"/>
+            <a:off x="1133856" y="4956048"/>
+            <a:ext cx="1554480" cy="384048"/>
           </a:xfrm>
           <a:prstGeom prst="rect">
             <a:avLst/>
@@ -5392,14 +5815,14 @@
       </p:sp>
       <p:sp>
         <p:nvSpPr>
-          <p:cNvPr id="41" name="Rectangle 40"/>
+          <p:cNvPr id="51" name="Rectangle 50"/>
           <p:cNvSpPr/>
           <p:nvPr/>
         </p:nvSpPr>
         <p:spPr>
           <a:xfrm>
-            <a:off x="2688336" y="4754880"/>
-            <a:ext cx="9198864" cy="512064"/>
+            <a:off x="2688336" y="4956048"/>
+            <a:ext cx="9198864" cy="384048"/>
           </a:xfrm>
           <a:prstGeom prst="rect">
             <a:avLst/>
@@ -5435,14 +5858,14 @@
       </p:sp>
       <p:sp>
         <p:nvSpPr>
-          <p:cNvPr id="42" name="TextBox 41"/>
+          <p:cNvPr id="52" name="TextBox 51"/>
           <p:cNvSpPr txBox="1"/>
           <p:nvPr/>
         </p:nvSpPr>
         <p:spPr>
           <a:xfrm>
-            <a:off x="2798064" y="4754880"/>
-            <a:ext cx="9015984" cy="512064"/>
+            <a:off x="2798064" y="4956048"/>
+            <a:ext cx="9015984" cy="384048"/>
           </a:xfrm>
           <a:prstGeom prst="rect">
             <a:avLst/>
@@ -5477,14 +5900,14 @@
       </p:sp>
       <p:sp>
         <p:nvSpPr>
-          <p:cNvPr id="43" name="TextBox 42"/>
+          <p:cNvPr id="53" name="TextBox 52"/>
           <p:cNvSpPr txBox="1"/>
           <p:nvPr/>
         </p:nvSpPr>
         <p:spPr>
           <a:xfrm>
-            <a:off x="256032" y="5321808"/>
-            <a:ext cx="841248" cy="384048"/>
+            <a:off x="256032" y="5394960"/>
+            <a:ext cx="841248" cy="310896"/>
           </a:xfrm>
           <a:prstGeom prst="rect">
             <a:avLst/>
@@ -5519,14 +5942,14 @@
       </p:sp>
       <p:sp>
         <p:nvSpPr>
-          <p:cNvPr id="44" name="Rectangle 43"/>
+          <p:cNvPr id="54" name="Rectangle 53"/>
           <p:cNvSpPr/>
           <p:nvPr/>
         </p:nvSpPr>
         <p:spPr>
           <a:xfrm>
-            <a:off x="1133856" y="5321808"/>
-            <a:ext cx="1554480" cy="384048"/>
+            <a:off x="1133856" y="5394960"/>
+            <a:ext cx="1554480" cy="310896"/>
           </a:xfrm>
           <a:prstGeom prst="rect">
             <a:avLst/>
@@ -5580,14 +6003,14 @@
       </p:sp>
       <p:sp>
         <p:nvSpPr>
-          <p:cNvPr id="45" name="Rectangle 44"/>
+          <p:cNvPr id="55" name="Rectangle 54"/>
           <p:cNvSpPr/>
           <p:nvPr/>
         </p:nvSpPr>
         <p:spPr>
           <a:xfrm>
-            <a:off x="2688336" y="5321808"/>
-            <a:ext cx="9198864" cy="384048"/>
+            <a:off x="2688336" y="5394960"/>
+            <a:ext cx="9198864" cy="310896"/>
           </a:xfrm>
           <a:prstGeom prst="rect">
             <a:avLst/>
@@ -5623,14 +6046,14 @@
       </p:sp>
       <p:sp>
         <p:nvSpPr>
-          <p:cNvPr id="46" name="TextBox 45"/>
+          <p:cNvPr id="56" name="TextBox 55"/>
           <p:cNvSpPr txBox="1"/>
           <p:nvPr/>
         </p:nvSpPr>
         <p:spPr>
           <a:xfrm>
-            <a:off x="2798064" y="5321808"/>
-            <a:ext cx="9015984" cy="384048"/>
+            <a:off x="2798064" y="5394960"/>
+            <a:ext cx="9015984" cy="310896"/>
           </a:xfrm>
           <a:prstGeom prst="rect">
             <a:avLst/>
@@ -5665,14 +6088,14 @@
       </p:sp>
       <p:sp>
         <p:nvSpPr>
-          <p:cNvPr id="47" name="TextBox 46"/>
+          <p:cNvPr id="57" name="TextBox 56"/>
           <p:cNvSpPr txBox="1"/>
           <p:nvPr/>
         </p:nvSpPr>
         <p:spPr>
           <a:xfrm>
             <a:off x="256032" y="5760720"/>
-            <a:ext cx="841248" cy="384048"/>
+            <a:ext cx="841248" cy="310896"/>
           </a:xfrm>
           <a:prstGeom prst="rect">
             <a:avLst/>
@@ -5707,14 +6130,14 @@
       </p:sp>
       <p:sp>
         <p:nvSpPr>
-          <p:cNvPr id="48" name="Rectangle 47"/>
+          <p:cNvPr id="58" name="Rectangle 57"/>
           <p:cNvSpPr/>
           <p:nvPr/>
         </p:nvSpPr>
         <p:spPr>
           <a:xfrm>
             <a:off x="1133856" y="5760720"/>
-            <a:ext cx="1554480" cy="384048"/>
+            <a:ext cx="1554480" cy="310896"/>
           </a:xfrm>
           <a:prstGeom prst="rect">
             <a:avLst/>
@@ -5768,14 +6191,14 @@
       </p:sp>
       <p:sp>
         <p:nvSpPr>
-          <p:cNvPr id="49" name="Rectangle 48"/>
+          <p:cNvPr id="59" name="Rectangle 58"/>
           <p:cNvSpPr/>
           <p:nvPr/>
         </p:nvSpPr>
         <p:spPr>
           <a:xfrm>
             <a:off x="2688336" y="5760720"/>
-            <a:ext cx="9198864" cy="384048"/>
+            <a:ext cx="9198864" cy="310896"/>
           </a:xfrm>
           <a:prstGeom prst="rect">
             <a:avLst/>
@@ -5811,14 +6234,14 @@
       </p:sp>
       <p:sp>
         <p:nvSpPr>
-          <p:cNvPr id="50" name="TextBox 49"/>
+          <p:cNvPr id="60" name="TextBox 59"/>
           <p:cNvSpPr txBox="1"/>
           <p:nvPr/>
         </p:nvSpPr>
         <p:spPr>
           <a:xfrm>
             <a:off x="2798064" y="5760720"/>
-            <a:ext cx="9015984" cy="384048"/>
+            <a:ext cx="9015984" cy="310896"/>
           </a:xfrm>
           <a:prstGeom prst="rect">
             <a:avLst/>
@@ -5853,14 +6276,14 @@
       </p:sp>
       <p:sp>
         <p:nvSpPr>
-          <p:cNvPr id="51" name="TextBox 50"/>
+          <p:cNvPr id="61" name="TextBox 60"/>
           <p:cNvSpPr txBox="1"/>
           <p:nvPr/>
         </p:nvSpPr>
         <p:spPr>
           <a:xfrm>
-            <a:off x="292608" y="6199632"/>
-            <a:ext cx="11612880" cy="512064"/>
+            <a:off x="292608" y="6126480"/>
+            <a:ext cx="11612880" cy="585216"/>
           </a:xfrm>
           <a:prstGeom prst="rect">
             <a:avLst/>
@@ -5888,7 +6311,7 @@
                 <a:ea typeface="Microsoft YaHei"/>
                 <a:cs typeface="Microsoft YaHei"/>
               </a:rPr>
-              <a:t>两条路径互不为下层。Motor 不跑模型前向；实例内组批在 LLM Manager，或在 vLLM-Ascend。</a:t>
+              <a:t>Mooncake 不是调用链上的一层。Conductor 把 KV 位置交给 Coordinator 做亲和调度；Store 和 connector 挂在引擎侧。</a:t>
             </a:r>
           </a:p>
           <a:p>
@@ -5909,7 +6332,7 @@
                 <a:ea typeface="Microsoft YaHei"/>
                 <a:cs typeface="Microsoft YaHei"/>
               </a:rPr>
-              <a:t>EngineServer 的接口写了 vLLM、SGLang 和 MindIE，这一版只支持 vLLM。</a:t>
+              <a:t>池化还可选 MemCache。亲和调度与按层推入共享池是两套配置，不叠在同一次传输上。</a:t>
             </a:r>
           </a:p>
         </p:txBody>

--- a/docs/ascend-infer-stack.pptx
+++ b/docs/ascend-infer-stack.pptx
@@ -502,7 +502,7 @@
           <a:lstStyle/>
           <a:p>
             <a:r>
-              <a:t>依据 MindIE 3.1 用户手册 Overview 与 MindIE Motor 3.1 架构说明。MindIE LLM 进入维护，官方建议新部署使用 MindIE Motor 加 vLLM-Ascend。MindIE LLM 自上而下为 Server、LLM Manager、Text Generator、Modeling。LLM Manager 内的 Engine 编排 Scheduler、Executor 和 Worker；Block Manager 管 KV 池。Executor 把调度结果下发给 Text Generator，覆盖跨节点、跨设备。Text Generator 含前处理、Generator、Sampler，并支持可插拔的并行解码。Modeling 提供 ATB Models；开发者架构说明同时支持 ACLGraph 和 ATBGraph。Motor：Coordinator 为数据面入口；Controller 与 NodeManager 为管控面；EngineServer 北向接二者，南向当前仅 vLLM。架构页写明南向接口包括 vLLM、SGLang 和 MindIE，当前版本只支持 vLLM。MindCluster 提供 Kubernetes、PD 分离 CRD 和 Operator，位于调用链外侧。CCAE 可选。CANN 组成沿用方案概述：AscendCL、GE、Runtime、算子库、HCCL、DVPP。推理运行包为 NNRT。KV：MindIE LLM 的 Block Manager 管 DP 内 KV，kv connector 对接池化后端，Mooncake 是其中一种 backend。Motor 的亲和调度依赖 Mooncake Conductor：P 实例用 ZMQ 发布 KV 事件，Coordinator 按位置调度。3.1 中文页写优先送到已缓存该 KV 的 D 实例；英文页写优先送到已有前缀 KV 的 P 实例。图上只写按位置调度。Motor 的 KV 池基于 vLLM-Ascend：MultiConnector 把 MooncakeConnector 与 AscendStoreConnector 组合。Mooncake Store 由 mooncake_master 管理；另一后端是 MemCache。Conductor 设计里还可接 YuanRong。共享池推入可以使用按层 connector。亲和调度文档建议此时不要再按层单独传输，由 Conductor 管全局位置。</a:t>
+              <a:t>依据 MindIE 3.1 用户手册 Overview 与 MindIE Motor 3.1 架构说明。MindIE LLM 进入维护，官方建议新部署使用 MindIE Motor 加 vLLM-Ascend。MindIE LLM 自上而下为 Server、LLM Manager、Text Generator、Modeling。LLM Manager 内的 Engine 编排 Scheduler、Executor 和 Worker；Block Manager 管 KV 池。Executor 把调度结果下发给 Text Generator，覆盖跨节点、跨设备。Text Generator 含前处理、Generator、Sampler，并支持可插拔的并行解码。Modeling 提供 ATB Models；开发者架构说明同时支持 ACLGraph 和 ATBGraph。Motor：Coordinator 为数据面入口；Controller 与 NodeManager 为管控面；EngineServer 北向接二者，南向当前仅 vLLM。架构页写明南向接口包括 vLLM、SGLang 和 MindIE，当前版本只支持 vLLM。MindCluster 提供 Kubernetes、PD 分离 CRD 和 Operator，位于调用链外侧。CCAE 可选。CANN 组成沿用方案概述：AscendCL、GE、Runtime、算子库、HCCL、DVPP。推理运行包为 NNRT。KV 池：Motor 3.1 默认后端是 MemCache，由 MetaService 管元数据、LocalService 管 DRAM；Mooncake 用 mooncake_master；还有 YuanRong。vLLM-Ascend 的按层池化目前只支持 MemCache。Mooncake Conductor 给 Coordinator 提供 KV 位置，用于亲和调度。通信库都在 CANN 内。HCCL 是集合通信库，服务张量并行和专家并行；HCOMM 是它的基础库，控制面管拓扑和资源，数据面管搬运和同步。HIXL 是单边通信库，LLM-DataDist 在这里做链路和 KV 的拉取、推送，支持 D2D、D2H、H2D。SHMEM 是对称内存库，给算子开发提供卡间单边访问。用户所说的 HCOM 对应文档名 HCOMM。</a:t>
             </a:r>
           </a:p>
         </p:txBody>
@@ -3685,8 +3685,8 @@
         </p:nvSpPr>
         <p:spPr>
           <a:xfrm>
-            <a:off x="256032" y="1133856"/>
-            <a:ext cx="841248" cy="438912"/>
+            <a:off x="256032" y="1115568"/>
+            <a:ext cx="841248" cy="329184"/>
           </a:xfrm>
           <a:prstGeom prst="rect">
             <a:avLst/>
@@ -3727,8 +3727,8 @@
         </p:nvSpPr>
         <p:spPr>
           <a:xfrm>
-            <a:off x="1133856" y="1133856"/>
-            <a:ext cx="1554480" cy="438912"/>
+            <a:off x="1133856" y="1115568"/>
+            <a:ext cx="1554480" cy="329184"/>
           </a:xfrm>
           <a:prstGeom prst="rect">
             <a:avLst/>
@@ -3788,8 +3788,8 @@
         </p:nvSpPr>
         <p:spPr>
           <a:xfrm>
-            <a:off x="2688336" y="1133856"/>
-            <a:ext cx="9198864" cy="438912"/>
+            <a:off x="2688336" y="1115568"/>
+            <a:ext cx="9198864" cy="329184"/>
           </a:xfrm>
           <a:prstGeom prst="rect">
             <a:avLst/>
@@ -3831,8 +3831,8 @@
         </p:nvSpPr>
         <p:spPr>
           <a:xfrm>
-            <a:off x="2798064" y="1133856"/>
-            <a:ext cx="9015984" cy="438912"/>
+            <a:off x="2798064" y="1115568"/>
+            <a:ext cx="9015984" cy="329184"/>
           </a:xfrm>
           <a:prstGeom prst="rect">
             <a:avLst/>
@@ -3860,7 +3860,7 @@
                 <a:ea typeface="Microsoft YaHei"/>
                 <a:cs typeface="Microsoft YaHei"/>
               </a:rPr>
-              <a:t>调用链外侧。承接两条路径的 Pod、PD 分离 CRD 和故障恢复。可选 CCAE 做算存网运维。</a:t>
+              <a:t>调用链外侧。Pod、PD 分离、故障恢复。可选 CCAE。</a:t>
             </a:r>
           </a:p>
         </p:txBody>
@@ -3873,8 +3873,8 @@
         </p:nvSpPr>
         <p:spPr>
           <a:xfrm>
-            <a:off x="256032" y="1645920"/>
-            <a:ext cx="841248" cy="2468880"/>
+            <a:off x="256032" y="1517904"/>
+            <a:ext cx="841248" cy="2267712"/>
           </a:xfrm>
           <a:prstGeom prst="rect">
             <a:avLst/>
@@ -3915,8 +3915,8 @@
         </p:nvSpPr>
         <p:spPr>
           <a:xfrm>
-            <a:off x="1133856" y="1645920"/>
-            <a:ext cx="5321808" cy="2468880"/>
+            <a:off x="1133856" y="1517904"/>
+            <a:ext cx="5321808" cy="2267712"/>
           </a:xfrm>
           <a:prstGeom prst="rect">
             <a:avLst/>
@@ -3960,7 +3960,7 @@
         </p:nvSpPr>
         <p:spPr>
           <a:xfrm>
-            <a:off x="1133856" y="1645920"/>
+            <a:off x="1133856" y="1517904"/>
             <a:ext cx="5321808" cy="310896"/>
           </a:xfrm>
           <a:prstGeom prst="rect">
@@ -4021,8 +4021,8 @@
         </p:nvSpPr>
         <p:spPr>
           <a:xfrm>
-            <a:off x="1207008" y="2029968"/>
-            <a:ext cx="1627632" cy="461772"/>
+            <a:off x="1207008" y="1901952"/>
+            <a:ext cx="1627632" cy="411480"/>
           </a:xfrm>
           <a:prstGeom prst="rect">
             <a:avLst/>
@@ -4082,8 +4082,8 @@
         </p:nvSpPr>
         <p:spPr>
           <a:xfrm>
-            <a:off x="2834640" y="2029968"/>
-            <a:ext cx="3547872" cy="461772"/>
+            <a:off x="2834640" y="1901952"/>
+            <a:ext cx="3547872" cy="411480"/>
           </a:xfrm>
           <a:prstGeom prst="rect">
             <a:avLst/>
@@ -4125,8 +4125,8 @@
         </p:nvSpPr>
         <p:spPr>
           <a:xfrm>
-            <a:off x="2926080" y="2029968"/>
-            <a:ext cx="3419856" cy="461772"/>
+            <a:off x="2926080" y="1901952"/>
+            <a:ext cx="3419856" cy="411480"/>
           </a:xfrm>
           <a:prstGeom prst="rect">
             <a:avLst/>
@@ -4167,8 +4167,8 @@
         </p:nvSpPr>
         <p:spPr>
           <a:xfrm>
-            <a:off x="1207008" y="2546604"/>
-            <a:ext cx="1627632" cy="461772"/>
+            <a:off x="1207008" y="2368296"/>
+            <a:ext cx="1627632" cy="411480"/>
           </a:xfrm>
           <a:prstGeom prst="rect">
             <a:avLst/>
@@ -4228,8 +4228,8 @@
         </p:nvSpPr>
         <p:spPr>
           <a:xfrm>
-            <a:off x="2834640" y="2546604"/>
-            <a:ext cx="3547872" cy="461772"/>
+            <a:off x="2834640" y="2368296"/>
+            <a:ext cx="3547872" cy="411480"/>
           </a:xfrm>
           <a:prstGeom prst="rect">
             <a:avLst/>
@@ -4271,8 +4271,8 @@
         </p:nvSpPr>
         <p:spPr>
           <a:xfrm>
-            <a:off x="2926080" y="2546604"/>
-            <a:ext cx="3419856" cy="461772"/>
+            <a:off x="2926080" y="2368296"/>
+            <a:ext cx="3419856" cy="411480"/>
           </a:xfrm>
           <a:prstGeom prst="rect">
             <a:avLst/>
@@ -4313,8 +4313,8 @@
         </p:nvSpPr>
         <p:spPr>
           <a:xfrm>
-            <a:off x="1207008" y="3063240"/>
-            <a:ext cx="1627632" cy="461772"/>
+            <a:off x="1207008" y="2834640"/>
+            <a:ext cx="1627632" cy="411480"/>
           </a:xfrm>
           <a:prstGeom prst="rect">
             <a:avLst/>
@@ -4374,8 +4374,8 @@
         </p:nvSpPr>
         <p:spPr>
           <a:xfrm>
-            <a:off x="2834640" y="3063240"/>
-            <a:ext cx="3547872" cy="461772"/>
+            <a:off x="2834640" y="2834640"/>
+            <a:ext cx="3547872" cy="411480"/>
           </a:xfrm>
           <a:prstGeom prst="rect">
             <a:avLst/>
@@ -4417,8 +4417,8 @@
         </p:nvSpPr>
         <p:spPr>
           <a:xfrm>
-            <a:off x="2926080" y="3063240"/>
-            <a:ext cx="3419856" cy="461772"/>
+            <a:off x="2926080" y="2834640"/>
+            <a:ext cx="3419856" cy="411480"/>
           </a:xfrm>
           <a:prstGeom prst="rect">
             <a:avLst/>
@@ -4459,8 +4459,8 @@
         </p:nvSpPr>
         <p:spPr>
           <a:xfrm>
-            <a:off x="1207008" y="3579876"/>
-            <a:ext cx="1627632" cy="461772"/>
+            <a:off x="1207008" y="3300984"/>
+            <a:ext cx="1627632" cy="411480"/>
           </a:xfrm>
           <a:prstGeom prst="rect">
             <a:avLst/>
@@ -4520,8 +4520,8 @@
         </p:nvSpPr>
         <p:spPr>
           <a:xfrm>
-            <a:off x="2834640" y="3579876"/>
-            <a:ext cx="3547872" cy="461772"/>
+            <a:off x="2834640" y="3300984"/>
+            <a:ext cx="3547872" cy="411480"/>
           </a:xfrm>
           <a:prstGeom prst="rect">
             <a:avLst/>
@@ -4563,8 +4563,8 @@
         </p:nvSpPr>
         <p:spPr>
           <a:xfrm>
-            <a:off x="2926080" y="3579876"/>
-            <a:ext cx="3419856" cy="461772"/>
+            <a:off x="2926080" y="3300984"/>
+            <a:ext cx="3419856" cy="411480"/>
           </a:xfrm>
           <a:prstGeom prst="rect">
             <a:avLst/>
@@ -4605,8 +4605,8 @@
         </p:nvSpPr>
         <p:spPr>
           <a:xfrm>
-            <a:off x="6565392" y="1645920"/>
-            <a:ext cx="5321808" cy="2468880"/>
+            <a:off x="6565392" y="1517904"/>
+            <a:ext cx="5321808" cy="2267712"/>
           </a:xfrm>
           <a:prstGeom prst="rect">
             <a:avLst/>
@@ -4650,7 +4650,7 @@
         </p:nvSpPr>
         <p:spPr>
           <a:xfrm>
-            <a:off x="6565392" y="1645920"/>
+            <a:off x="6565392" y="1517904"/>
             <a:ext cx="5321808" cy="310896"/>
           </a:xfrm>
           <a:prstGeom prst="rect">
@@ -4711,8 +4711,8 @@
         </p:nvSpPr>
         <p:spPr>
           <a:xfrm>
-            <a:off x="6638544" y="2029968"/>
-            <a:ext cx="1627632" cy="461772"/>
+            <a:off x="6638544" y="1901952"/>
+            <a:ext cx="1627632" cy="411480"/>
           </a:xfrm>
           <a:prstGeom prst="rect">
             <a:avLst/>
@@ -4772,8 +4772,8 @@
         </p:nvSpPr>
         <p:spPr>
           <a:xfrm>
-            <a:off x="8266176" y="2029968"/>
-            <a:ext cx="3547872" cy="461772"/>
+            <a:off x="8266176" y="1901952"/>
+            <a:ext cx="3547872" cy="411480"/>
           </a:xfrm>
           <a:prstGeom prst="rect">
             <a:avLst/>
@@ -4815,8 +4815,8 @@
         </p:nvSpPr>
         <p:spPr>
           <a:xfrm>
-            <a:off x="8357616" y="2029968"/>
-            <a:ext cx="3419856" cy="461772"/>
+            <a:off x="8357616" y="1901952"/>
+            <a:ext cx="3419856" cy="411480"/>
           </a:xfrm>
           <a:prstGeom prst="rect">
             <a:avLst/>
@@ -4857,8 +4857,8 @@
         </p:nvSpPr>
         <p:spPr>
           <a:xfrm>
-            <a:off x="6638544" y="2546604"/>
-            <a:ext cx="1627632" cy="461772"/>
+            <a:off x="6638544" y="2368296"/>
+            <a:ext cx="1627632" cy="411480"/>
           </a:xfrm>
           <a:prstGeom prst="rect">
             <a:avLst/>
@@ -4918,8 +4918,8 @@
         </p:nvSpPr>
         <p:spPr>
           <a:xfrm>
-            <a:off x="8266176" y="2546604"/>
-            <a:ext cx="3547872" cy="461772"/>
+            <a:off x="8266176" y="2368296"/>
+            <a:ext cx="3547872" cy="411480"/>
           </a:xfrm>
           <a:prstGeom prst="rect">
             <a:avLst/>
@@ -4961,8 +4961,8 @@
         </p:nvSpPr>
         <p:spPr>
           <a:xfrm>
-            <a:off x="8357616" y="2546604"/>
-            <a:ext cx="3419856" cy="461772"/>
+            <a:off x="8357616" y="2368296"/>
+            <a:ext cx="3419856" cy="411480"/>
           </a:xfrm>
           <a:prstGeom prst="rect">
             <a:avLst/>
@@ -5003,8 +5003,8 @@
         </p:nvSpPr>
         <p:spPr>
           <a:xfrm>
-            <a:off x="6638544" y="3063240"/>
-            <a:ext cx="1627632" cy="461772"/>
+            <a:off x="6638544" y="2834640"/>
+            <a:ext cx="1627632" cy="411480"/>
           </a:xfrm>
           <a:prstGeom prst="rect">
             <a:avLst/>
@@ -5064,8 +5064,8 @@
         </p:nvSpPr>
         <p:spPr>
           <a:xfrm>
-            <a:off x="8266176" y="3063240"/>
-            <a:ext cx="3547872" cy="461772"/>
+            <a:off x="8266176" y="2834640"/>
+            <a:ext cx="3547872" cy="411480"/>
           </a:xfrm>
           <a:prstGeom prst="rect">
             <a:avLst/>
@@ -5107,8 +5107,8 @@
         </p:nvSpPr>
         <p:spPr>
           <a:xfrm>
-            <a:off x="8357616" y="3063240"/>
-            <a:ext cx="3419856" cy="461772"/>
+            <a:off x="8357616" y="2834640"/>
+            <a:ext cx="3419856" cy="411480"/>
           </a:xfrm>
           <a:prstGeom prst="rect">
             <a:avLst/>
@@ -5149,8 +5149,8 @@
         </p:nvSpPr>
         <p:spPr>
           <a:xfrm>
-            <a:off x="6638544" y="3579876"/>
-            <a:ext cx="1627632" cy="461772"/>
+            <a:off x="6638544" y="3300984"/>
+            <a:ext cx="1627632" cy="411480"/>
           </a:xfrm>
           <a:prstGeom prst="rect">
             <a:avLst/>
@@ -5210,8 +5210,8 @@
         </p:nvSpPr>
         <p:spPr>
           <a:xfrm>
-            <a:off x="8266176" y="3579876"/>
-            <a:ext cx="3547872" cy="461772"/>
+            <a:off x="8266176" y="3300984"/>
+            <a:ext cx="3547872" cy="411480"/>
           </a:xfrm>
           <a:prstGeom prst="rect">
             <a:avLst/>
@@ -5253,8 +5253,8 @@
         </p:nvSpPr>
         <p:spPr>
           <a:xfrm>
-            <a:off x="8357616" y="3579876"/>
-            <a:ext cx="3419856" cy="461772"/>
+            <a:off x="8357616" y="3300984"/>
+            <a:ext cx="3419856" cy="411480"/>
           </a:xfrm>
           <a:prstGeom prst="rect">
             <a:avLst/>
@@ -5295,8 +5295,8 @@
         </p:nvSpPr>
         <p:spPr>
           <a:xfrm>
-            <a:off x="256032" y="4206240"/>
-            <a:ext cx="841248" cy="658368"/>
+            <a:off x="256032" y="3858768"/>
+            <a:ext cx="841248" cy="512064"/>
           </a:xfrm>
           <a:prstGeom prst="rect">
             <a:avLst/>
@@ -5316,15 +5316,15 @@
               </a:spcAft>
             </a:pPr>
             <a:r>
-              <a:rPr sz="1300" b="1">
+              <a:rPr sz="1200" b="1">
                 <a:solidFill>
-                  <a:srgbClr val="0E7A76"/>
+                  <a:srgbClr val="7A541C"/>
                 </a:solidFill>
                 <a:latin typeface="Microsoft YaHei"/>
                 <a:ea typeface="Microsoft YaHei"/>
                 <a:cs typeface="Microsoft YaHei"/>
               </a:rPr>
-              <a:t>KV</a:t>
+              <a:t>KV 池</a:t>
             </a:r>
           </a:p>
         </p:txBody>
@@ -5337,14 +5337,14 @@
         </p:nvSpPr>
         <p:spPr>
           <a:xfrm>
-            <a:off x="1133856" y="4206240"/>
-            <a:ext cx="3535680" cy="658368"/>
+            <a:off x="1133856" y="3858768"/>
+            <a:ext cx="3535680" cy="512064"/>
           </a:xfrm>
           <a:prstGeom prst="rect">
             <a:avLst/>
           </a:prstGeom>
           <a:solidFill>
-            <a:srgbClr val="0E7A76"/>
+            <a:srgbClr val="7A541C"/>
           </a:solidFill>
           <a:ln>
             <a:noFill/>
@@ -5380,8 +5380,8 @@
         </p:nvSpPr>
         <p:spPr>
           <a:xfrm>
-            <a:off x="1225296" y="4261103"/>
-            <a:ext cx="3352800" cy="237744"/>
+            <a:off x="1207008" y="3895344"/>
+            <a:ext cx="3389376" cy="219456"/>
           </a:xfrm>
           <a:prstGeom prst="rect">
             <a:avLst/>
@@ -5401,7 +5401,7 @@
               </a:spcAft>
             </a:pPr>
             <a:r>
-              <a:rPr sz="1400" b="1">
+              <a:rPr sz="1300" b="1">
                 <a:solidFill>
                   <a:srgbClr val="FFFFFF"/>
                 </a:solidFill>
@@ -5409,7 +5409,7 @@
                 <a:ea typeface="Microsoft YaHei"/>
                 <a:cs typeface="Microsoft YaHei"/>
               </a:rPr>
-              <a:t>实例内 KV</a:t>
+              <a:t>MemCache</a:t>
             </a:r>
           </a:p>
         </p:txBody>
@@ -5422,8 +5422,8 @@
         </p:nvSpPr>
         <p:spPr>
           <a:xfrm>
-            <a:off x="1225296" y="4498848"/>
-            <a:ext cx="3352800" cy="310896"/>
+            <a:off x="1207008" y="4114800"/>
+            <a:ext cx="3389376" cy="219456"/>
           </a:xfrm>
           <a:prstGeom prst="rect">
             <a:avLst/>
@@ -5443,7 +5443,7 @@
               </a:spcAft>
             </a:pPr>
             <a:r>
-              <a:rPr sz="1200" b="0">
+              <a:rPr sz="1100" b="0">
                 <a:solidFill>
                   <a:srgbClr val="FFFFFF"/>
                 </a:solidFill>
@@ -5451,7 +5451,7 @@
                 <a:ea typeface="Microsoft YaHei"/>
                 <a:cs typeface="Microsoft YaHei"/>
               </a:rPr>
-              <a:t>Block Manager，以及 vLLM 的本卡池</a:t>
+              <a:t>默认后端。元数据与 DRAM 池。</a:t>
             </a:r>
           </a:p>
         </p:txBody>
@@ -5464,135 +5464,8 @@
         </p:nvSpPr>
         <p:spPr>
           <a:xfrm>
-            <a:off x="4742688" y="4206240"/>
-            <a:ext cx="3535680" cy="658368"/>
-          </a:xfrm>
-          <a:prstGeom prst="rect">
-            <a:avLst/>
-          </a:prstGeom>
-          <a:solidFill>
-            <a:srgbClr val="145A96"/>
-          </a:solidFill>
-          <a:ln>
-            <a:noFill/>
-          </a:ln>
-        </p:spPr>
-        <p:style>
-          <a:lnRef idx="1">
-            <a:schemeClr val="accent1"/>
-          </a:lnRef>
-          <a:fillRef idx="3">
-            <a:schemeClr val="accent1"/>
-          </a:fillRef>
-          <a:effectRef idx="2">
-            <a:schemeClr val="accent1"/>
-          </a:effectRef>
-          <a:fontRef idx="minor">
-            <a:schemeClr val="lt1"/>
-          </a:fontRef>
-        </p:style>
-        <p:txBody>
-          <a:bodyPr rtlCol="0" anchor="ctr"/>
-          <a:lstStyle/>
-          <a:p>
-            <a:pPr algn="ctr"/>
-          </a:p>
-        </p:txBody>
-      </p:sp>
-      <p:sp>
-        <p:nvSpPr>
-          <p:cNvPr id="44" name="TextBox 43"/>
-          <p:cNvSpPr txBox="1"/>
-          <p:nvPr/>
-        </p:nvSpPr>
-        <p:spPr>
-          <a:xfrm>
-            <a:off x="4834128" y="4261103"/>
-            <a:ext cx="3352800" cy="237744"/>
-          </a:xfrm>
-          <a:prstGeom prst="rect">
-            <a:avLst/>
-          </a:prstGeom>
-          <a:noFill/>
-        </p:spPr>
-        <p:txBody>
-          <a:bodyPr wrap="square" lIns="0" rIns="0" tIns="0" bIns="0" anchor="ctr"/>
-          <a:lstStyle/>
-          <a:p>
-            <a:pPr algn="l">
-              <a:spcBef>
-                <a:spcPts val="0"/>
-              </a:spcBef>
-              <a:spcAft>
-                <a:spcPts val="0"/>
-              </a:spcAft>
-            </a:pPr>
-            <a:r>
-              <a:rPr sz="1400" b="1">
-                <a:solidFill>
-                  <a:srgbClr val="FFFFFF"/>
-                </a:solidFill>
-                <a:latin typeface="Microsoft YaHei"/>
-                <a:ea typeface="Microsoft YaHei"/>
-                <a:cs typeface="Microsoft YaHei"/>
-              </a:rPr>
-              <a:t>跨实例搬运</a:t>
-            </a:r>
-          </a:p>
-        </p:txBody>
-      </p:sp>
-      <p:sp>
-        <p:nvSpPr>
-          <p:cNvPr id="45" name="TextBox 44"/>
-          <p:cNvSpPr txBox="1"/>
-          <p:nvPr/>
-        </p:nvSpPr>
-        <p:spPr>
-          <a:xfrm>
-            <a:off x="4834128" y="4498848"/>
-            <a:ext cx="3352800" cy="310896"/>
-          </a:xfrm>
-          <a:prstGeom prst="rect">
-            <a:avLst/>
-          </a:prstGeom>
-          <a:noFill/>
-        </p:spPr>
-        <p:txBody>
-          <a:bodyPr wrap="square" lIns="0" rIns="0" tIns="0" bIns="0" anchor="t"/>
-          <a:lstStyle/>
-          <a:p>
-            <a:pPr algn="l">
-              <a:spcBef>
-                <a:spcPts val="0"/>
-              </a:spcBef>
-              <a:spcAft>
-                <a:spcPts val="0"/>
-              </a:spcAft>
-            </a:pPr>
-            <a:r>
-              <a:rPr sz="1200" b="0">
-                <a:solidFill>
-                  <a:srgbClr val="FFFFFF"/>
-                </a:solidFill>
-                <a:latin typeface="Microsoft YaHei"/>
-                <a:ea typeface="Microsoft YaHei"/>
-                <a:cs typeface="Microsoft YaHei"/>
-              </a:rPr>
-              <a:t>kv connector 与 MooncakeConnector</a:t>
-            </a:r>
-          </a:p>
-        </p:txBody>
-      </p:sp>
-      <p:sp>
-        <p:nvSpPr>
-          <p:cNvPr id="46" name="Rectangle 45"/>
-          <p:cNvSpPr/>
-          <p:nvPr/>
-        </p:nvSpPr>
-        <p:spPr>
-          <a:xfrm>
-            <a:off x="8351520" y="4206240"/>
-            <a:ext cx="3535680" cy="658368"/>
+            <a:off x="4742688" y="3858768"/>
+            <a:ext cx="3535680" cy="512064"/>
           </a:xfrm>
           <a:prstGeom prst="rect">
             <a:avLst/>
@@ -5628,14 +5501,14 @@
       </p:sp>
       <p:sp>
         <p:nvSpPr>
-          <p:cNvPr id="47" name="TextBox 46"/>
+          <p:cNvPr id="44" name="TextBox 43"/>
           <p:cNvSpPr txBox="1"/>
           <p:nvPr/>
         </p:nvSpPr>
         <p:spPr>
           <a:xfrm>
-            <a:off x="8442960" y="4261103"/>
-            <a:ext cx="3352800" cy="237744"/>
+            <a:off x="4815840" y="3895344"/>
+            <a:ext cx="3389376" cy="219456"/>
           </a:xfrm>
           <a:prstGeom prst="rect">
             <a:avLst/>
@@ -5655,7 +5528,7 @@
               </a:spcAft>
             </a:pPr>
             <a:r>
-              <a:rPr sz="1400" b="1">
+              <a:rPr sz="1300" b="1">
                 <a:solidFill>
                   <a:srgbClr val="FFFFFF"/>
                 </a:solidFill>
@@ -5670,14 +5543,14 @@
       </p:sp>
       <p:sp>
         <p:nvSpPr>
-          <p:cNvPr id="48" name="TextBox 47"/>
+          <p:cNvPr id="45" name="TextBox 44"/>
           <p:cNvSpPr txBox="1"/>
           <p:nvPr/>
         </p:nvSpPr>
         <p:spPr>
           <a:xfrm>
-            <a:off x="8442960" y="4498848"/>
-            <a:ext cx="3352800" cy="310896"/>
+            <a:off x="4815840" y="4114800"/>
+            <a:ext cx="3389376" cy="219456"/>
           </a:xfrm>
           <a:prstGeom prst="rect">
             <a:avLst/>
@@ -5697,7 +5570,7 @@
               </a:spcAft>
             </a:pPr>
             <a:r>
-              <a:rPr sz="1200" b="0">
+              <a:rPr sz="1100" b="0">
                 <a:solidFill>
                   <a:srgbClr val="FFFFFF"/>
                 </a:solidFill>
@@ -5705,7 +5578,134 @@
                 <a:ea typeface="Microsoft YaHei"/>
                 <a:cs typeface="Microsoft YaHei"/>
               </a:rPr>
-              <a:t>Conductor 管位置，Store 做共享池</a:t>
+              <a:t>mooncake_master。Conductor 管 KV 位置。</a:t>
+            </a:r>
+          </a:p>
+        </p:txBody>
+      </p:sp>
+      <p:sp>
+        <p:nvSpPr>
+          <p:cNvPr id="46" name="Rectangle 45"/>
+          <p:cNvSpPr/>
+          <p:nvPr/>
+        </p:nvSpPr>
+        <p:spPr>
+          <a:xfrm>
+            <a:off x="8351520" y="3858768"/>
+            <a:ext cx="3535680" cy="512064"/>
+          </a:xfrm>
+          <a:prstGeom prst="rect">
+            <a:avLst/>
+          </a:prstGeom>
+          <a:solidFill>
+            <a:srgbClr val="0E7A76"/>
+          </a:solidFill>
+          <a:ln>
+            <a:noFill/>
+          </a:ln>
+        </p:spPr>
+        <p:style>
+          <a:lnRef idx="1">
+            <a:schemeClr val="accent1"/>
+          </a:lnRef>
+          <a:fillRef idx="3">
+            <a:schemeClr val="accent1"/>
+          </a:fillRef>
+          <a:effectRef idx="2">
+            <a:schemeClr val="accent1"/>
+          </a:effectRef>
+          <a:fontRef idx="minor">
+            <a:schemeClr val="lt1"/>
+          </a:fontRef>
+        </p:style>
+        <p:txBody>
+          <a:bodyPr rtlCol="0" anchor="ctr"/>
+          <a:lstStyle/>
+          <a:p>
+            <a:pPr algn="ctr"/>
+          </a:p>
+        </p:txBody>
+      </p:sp>
+      <p:sp>
+        <p:nvSpPr>
+          <p:cNvPr id="47" name="TextBox 46"/>
+          <p:cNvSpPr txBox="1"/>
+          <p:nvPr/>
+        </p:nvSpPr>
+        <p:spPr>
+          <a:xfrm>
+            <a:off x="8424672" y="3895344"/>
+            <a:ext cx="3389376" cy="219456"/>
+          </a:xfrm>
+          <a:prstGeom prst="rect">
+            <a:avLst/>
+          </a:prstGeom>
+          <a:noFill/>
+        </p:spPr>
+        <p:txBody>
+          <a:bodyPr wrap="square" lIns="0" rIns="0" tIns="0" bIns="0" anchor="ctr"/>
+          <a:lstStyle/>
+          <a:p>
+            <a:pPr algn="l">
+              <a:spcBef>
+                <a:spcPts val="0"/>
+              </a:spcBef>
+              <a:spcAft>
+                <a:spcPts val="0"/>
+              </a:spcAft>
+            </a:pPr>
+            <a:r>
+              <a:rPr sz="1300" b="1">
+                <a:solidFill>
+                  <a:srgbClr val="FFFFFF"/>
+                </a:solidFill>
+                <a:latin typeface="Microsoft YaHei"/>
+                <a:ea typeface="Microsoft YaHei"/>
+                <a:cs typeface="Microsoft YaHei"/>
+              </a:rPr>
+              <a:t>实例内</a:t>
+            </a:r>
+          </a:p>
+        </p:txBody>
+      </p:sp>
+      <p:sp>
+        <p:nvSpPr>
+          <p:cNvPr id="48" name="TextBox 47"/>
+          <p:cNvSpPr txBox="1"/>
+          <p:nvPr/>
+        </p:nvSpPr>
+        <p:spPr>
+          <a:xfrm>
+            <a:off x="8424672" y="4114800"/>
+            <a:ext cx="3389376" cy="219456"/>
+          </a:xfrm>
+          <a:prstGeom prst="rect">
+            <a:avLst/>
+          </a:prstGeom>
+          <a:noFill/>
+        </p:spPr>
+        <p:txBody>
+          <a:bodyPr wrap="square" lIns="0" rIns="0" tIns="0" bIns="0" anchor="t"/>
+          <a:lstStyle/>
+          <a:p>
+            <a:pPr algn="l">
+              <a:spcBef>
+                <a:spcPts val="0"/>
+              </a:spcBef>
+              <a:spcAft>
+                <a:spcPts val="0"/>
+              </a:spcAft>
+            </a:pPr>
+            <a:r>
+              <a:rPr sz="1100" b="0">
+                <a:solidFill>
+                  <a:srgbClr val="FFFFFF"/>
+                </a:solidFill>
+                <a:latin typeface="Microsoft YaHei"/>
+                <a:ea typeface="Microsoft YaHei"/>
+                <a:cs typeface="Microsoft YaHei"/>
+              </a:rPr>
+              <a:t>Block Manager 与 vLLM 本卡池。另有 YuanRong。</a:t>
             </a:r>
           </a:p>
         </p:txBody>
@@ -5718,8 +5718,558 @@
         </p:nvSpPr>
         <p:spPr>
           <a:xfrm>
-            <a:off x="256032" y="4956048"/>
-            <a:ext cx="841248" cy="384048"/>
+            <a:off x="256032" y="4443984"/>
+            <a:ext cx="841248" cy="585216"/>
+          </a:xfrm>
+          <a:prstGeom prst="rect">
+            <a:avLst/>
+          </a:prstGeom>
+          <a:noFill/>
+        </p:spPr>
+        <p:txBody>
+          <a:bodyPr wrap="square" lIns="0" rIns="0" tIns="0" bIns="0" anchor="ctr"/>
+          <a:lstStyle/>
+          <a:p>
+            <a:pPr algn="l">
+              <a:spcBef>
+                <a:spcPts val="0"/>
+              </a:spcBef>
+              <a:spcAft>
+                <a:spcPts val="0"/>
+              </a:spcAft>
+            </a:pPr>
+            <a:r>
+              <a:rPr sz="1200" b="1">
+                <a:solidFill>
+                  <a:srgbClr val="145A96"/>
+                </a:solidFill>
+                <a:latin typeface="Microsoft YaHei"/>
+                <a:ea typeface="Microsoft YaHei"/>
+                <a:cs typeface="Microsoft YaHei"/>
+              </a:rPr>
+              <a:t>通信</a:t>
+            </a:r>
+          </a:p>
+        </p:txBody>
+      </p:sp>
+      <p:sp>
+        <p:nvSpPr>
+          <p:cNvPr id="50" name="Rectangle 49"/>
+          <p:cNvSpPr/>
+          <p:nvPr/>
+        </p:nvSpPr>
+        <p:spPr>
+          <a:xfrm>
+            <a:off x="1133856" y="4443984"/>
+            <a:ext cx="2633472" cy="585216"/>
+          </a:xfrm>
+          <a:prstGeom prst="rect">
+            <a:avLst/>
+          </a:prstGeom>
+          <a:solidFill>
+            <a:srgbClr val="145A96"/>
+          </a:solidFill>
+          <a:ln>
+            <a:noFill/>
+          </a:ln>
+        </p:spPr>
+        <p:style>
+          <a:lnRef idx="1">
+            <a:schemeClr val="accent1"/>
+          </a:lnRef>
+          <a:fillRef idx="3">
+            <a:schemeClr val="accent1"/>
+          </a:fillRef>
+          <a:effectRef idx="2">
+            <a:schemeClr val="accent1"/>
+          </a:effectRef>
+          <a:fontRef idx="minor">
+            <a:schemeClr val="lt1"/>
+          </a:fontRef>
+        </p:style>
+        <p:txBody>
+          <a:bodyPr rtlCol="0" anchor="ctr"/>
+          <a:lstStyle/>
+          <a:p>
+            <a:pPr algn="ctr"/>
+          </a:p>
+        </p:txBody>
+      </p:sp>
+      <p:sp>
+        <p:nvSpPr>
+          <p:cNvPr id="51" name="TextBox 50"/>
+          <p:cNvSpPr txBox="1"/>
+          <p:nvPr/>
+        </p:nvSpPr>
+        <p:spPr>
+          <a:xfrm>
+            <a:off x="1207008" y="4480560"/>
+            <a:ext cx="2487168" cy="219456"/>
+          </a:xfrm>
+          <a:prstGeom prst="rect">
+            <a:avLst/>
+          </a:prstGeom>
+          <a:noFill/>
+        </p:spPr>
+        <p:txBody>
+          <a:bodyPr wrap="square" lIns="0" rIns="0" tIns="0" bIns="0" anchor="ctr"/>
+          <a:lstStyle/>
+          <a:p>
+            <a:pPr algn="l">
+              <a:spcBef>
+                <a:spcPts val="0"/>
+              </a:spcBef>
+              <a:spcAft>
+                <a:spcPts val="0"/>
+              </a:spcAft>
+            </a:pPr>
+            <a:r>
+              <a:rPr sz="1300" b="1">
+                <a:solidFill>
+                  <a:srgbClr val="FFFFFF"/>
+                </a:solidFill>
+                <a:latin typeface="Microsoft YaHei"/>
+                <a:ea typeface="Microsoft YaHei"/>
+                <a:cs typeface="Microsoft YaHei"/>
+              </a:rPr>
+              <a:t>HCCL</a:t>
+            </a:r>
+          </a:p>
+        </p:txBody>
+      </p:sp>
+      <p:sp>
+        <p:nvSpPr>
+          <p:cNvPr id="52" name="TextBox 51"/>
+          <p:cNvSpPr txBox="1"/>
+          <p:nvPr/>
+        </p:nvSpPr>
+        <p:spPr>
+          <a:xfrm>
+            <a:off x="1207008" y="4700016"/>
+            <a:ext cx="2487168" cy="292608"/>
+          </a:xfrm>
+          <a:prstGeom prst="rect">
+            <a:avLst/>
+          </a:prstGeom>
+          <a:noFill/>
+        </p:spPr>
+        <p:txBody>
+          <a:bodyPr wrap="square" lIns="0" rIns="0" tIns="0" bIns="0" anchor="t"/>
+          <a:lstStyle/>
+          <a:p>
+            <a:pPr algn="l">
+              <a:spcBef>
+                <a:spcPts val="0"/>
+              </a:spcBef>
+              <a:spcAft>
+                <a:spcPts val="0"/>
+              </a:spcAft>
+            </a:pPr>
+            <a:r>
+              <a:rPr sz="1100" b="0">
+                <a:solidFill>
+                  <a:srgbClr val="FFFFFF"/>
+                </a:solidFill>
+                <a:latin typeface="Microsoft YaHei"/>
+                <a:ea typeface="Microsoft YaHei"/>
+                <a:cs typeface="Microsoft YaHei"/>
+              </a:rPr>
+              <a:t>集合通信。服务张量并行和专家并行。</a:t>
+            </a:r>
+          </a:p>
+        </p:txBody>
+      </p:sp>
+      <p:sp>
+        <p:nvSpPr>
+          <p:cNvPr id="53" name="Rectangle 52"/>
+          <p:cNvSpPr/>
+          <p:nvPr/>
+        </p:nvSpPr>
+        <p:spPr>
+          <a:xfrm>
+            <a:off x="3840480" y="4443984"/>
+            <a:ext cx="2633472" cy="585216"/>
+          </a:xfrm>
+          <a:prstGeom prst="rect">
+            <a:avLst/>
+          </a:prstGeom>
+          <a:solidFill>
+            <a:srgbClr val="2E4A6E"/>
+          </a:solidFill>
+          <a:ln>
+            <a:noFill/>
+          </a:ln>
+        </p:spPr>
+        <p:style>
+          <a:lnRef idx="1">
+            <a:schemeClr val="accent1"/>
+          </a:lnRef>
+          <a:fillRef idx="3">
+            <a:schemeClr val="accent1"/>
+          </a:fillRef>
+          <a:effectRef idx="2">
+            <a:schemeClr val="accent1"/>
+          </a:effectRef>
+          <a:fontRef idx="minor">
+            <a:schemeClr val="lt1"/>
+          </a:fontRef>
+        </p:style>
+        <p:txBody>
+          <a:bodyPr rtlCol="0" anchor="ctr"/>
+          <a:lstStyle/>
+          <a:p>
+            <a:pPr algn="ctr"/>
+          </a:p>
+        </p:txBody>
+      </p:sp>
+      <p:sp>
+        <p:nvSpPr>
+          <p:cNvPr id="54" name="TextBox 53"/>
+          <p:cNvSpPr txBox="1"/>
+          <p:nvPr/>
+        </p:nvSpPr>
+        <p:spPr>
+          <a:xfrm>
+            <a:off x="3913632" y="4480560"/>
+            <a:ext cx="2487168" cy="219456"/>
+          </a:xfrm>
+          <a:prstGeom prst="rect">
+            <a:avLst/>
+          </a:prstGeom>
+          <a:noFill/>
+        </p:spPr>
+        <p:txBody>
+          <a:bodyPr wrap="square" lIns="0" rIns="0" tIns="0" bIns="0" anchor="ctr"/>
+          <a:lstStyle/>
+          <a:p>
+            <a:pPr algn="l">
+              <a:spcBef>
+                <a:spcPts val="0"/>
+              </a:spcBef>
+              <a:spcAft>
+                <a:spcPts val="0"/>
+              </a:spcAft>
+            </a:pPr>
+            <a:r>
+              <a:rPr sz="1300" b="1">
+                <a:solidFill>
+                  <a:srgbClr val="FFFFFF"/>
+                </a:solidFill>
+                <a:latin typeface="Microsoft YaHei"/>
+                <a:ea typeface="Microsoft YaHei"/>
+                <a:cs typeface="Microsoft YaHei"/>
+              </a:rPr>
+              <a:t>HCOMM</a:t>
+            </a:r>
+          </a:p>
+        </p:txBody>
+      </p:sp>
+      <p:sp>
+        <p:nvSpPr>
+          <p:cNvPr id="55" name="TextBox 54"/>
+          <p:cNvSpPr txBox="1"/>
+          <p:nvPr/>
+        </p:nvSpPr>
+        <p:spPr>
+          <a:xfrm>
+            <a:off x="3913632" y="4700016"/>
+            <a:ext cx="2487168" cy="292608"/>
+          </a:xfrm>
+          <a:prstGeom prst="rect">
+            <a:avLst/>
+          </a:prstGeom>
+          <a:noFill/>
+        </p:spPr>
+        <p:txBody>
+          <a:bodyPr wrap="square" lIns="0" rIns="0" tIns="0" bIns="0" anchor="t"/>
+          <a:lstStyle/>
+          <a:p>
+            <a:pPr algn="l">
+              <a:spcBef>
+                <a:spcPts val="0"/>
+              </a:spcBef>
+              <a:spcAft>
+                <a:spcPts val="0"/>
+              </a:spcAft>
+            </a:pPr>
+            <a:r>
+              <a:rPr sz="1100" b="0">
+                <a:solidFill>
+                  <a:srgbClr val="FFFFFF"/>
+                </a:solidFill>
+                <a:latin typeface="Microsoft YaHei"/>
+                <a:ea typeface="Microsoft YaHei"/>
+                <a:cs typeface="Microsoft YaHei"/>
+              </a:rPr>
+              <a:t>HCCL 的基础库。控制面与数据面。</a:t>
+            </a:r>
+          </a:p>
+        </p:txBody>
+      </p:sp>
+      <p:sp>
+        <p:nvSpPr>
+          <p:cNvPr id="56" name="Rectangle 55"/>
+          <p:cNvSpPr/>
+          <p:nvPr/>
+        </p:nvSpPr>
+        <p:spPr>
+          <a:xfrm>
+            <a:off x="6547104" y="4443984"/>
+            <a:ext cx="2633472" cy="585216"/>
+          </a:xfrm>
+          <a:prstGeom prst="rect">
+            <a:avLst/>
+          </a:prstGeom>
+          <a:solidFill>
+            <a:srgbClr val="0E7A76"/>
+          </a:solidFill>
+          <a:ln>
+            <a:noFill/>
+          </a:ln>
+        </p:spPr>
+        <p:style>
+          <a:lnRef idx="1">
+            <a:schemeClr val="accent1"/>
+          </a:lnRef>
+          <a:fillRef idx="3">
+            <a:schemeClr val="accent1"/>
+          </a:fillRef>
+          <a:effectRef idx="2">
+            <a:schemeClr val="accent1"/>
+          </a:effectRef>
+          <a:fontRef idx="minor">
+            <a:schemeClr val="lt1"/>
+          </a:fontRef>
+        </p:style>
+        <p:txBody>
+          <a:bodyPr rtlCol="0" anchor="ctr"/>
+          <a:lstStyle/>
+          <a:p>
+            <a:pPr algn="ctr"/>
+          </a:p>
+        </p:txBody>
+      </p:sp>
+      <p:sp>
+        <p:nvSpPr>
+          <p:cNvPr id="57" name="TextBox 56"/>
+          <p:cNvSpPr txBox="1"/>
+          <p:nvPr/>
+        </p:nvSpPr>
+        <p:spPr>
+          <a:xfrm>
+            <a:off x="6620256" y="4480560"/>
+            <a:ext cx="2487168" cy="219456"/>
+          </a:xfrm>
+          <a:prstGeom prst="rect">
+            <a:avLst/>
+          </a:prstGeom>
+          <a:noFill/>
+        </p:spPr>
+        <p:txBody>
+          <a:bodyPr wrap="square" lIns="0" rIns="0" tIns="0" bIns="0" anchor="ctr"/>
+          <a:lstStyle/>
+          <a:p>
+            <a:pPr algn="l">
+              <a:spcBef>
+                <a:spcPts val="0"/>
+              </a:spcBef>
+              <a:spcAft>
+                <a:spcPts val="0"/>
+              </a:spcAft>
+            </a:pPr>
+            <a:r>
+              <a:rPr sz="1300" b="1">
+                <a:solidFill>
+                  <a:srgbClr val="FFFFFF"/>
+                </a:solidFill>
+                <a:latin typeface="Microsoft YaHei"/>
+                <a:ea typeface="Microsoft YaHei"/>
+                <a:cs typeface="Microsoft YaHei"/>
+              </a:rPr>
+              <a:t>HIXL</a:t>
+            </a:r>
+          </a:p>
+        </p:txBody>
+      </p:sp>
+      <p:sp>
+        <p:nvSpPr>
+          <p:cNvPr id="58" name="TextBox 57"/>
+          <p:cNvSpPr txBox="1"/>
+          <p:nvPr/>
+        </p:nvSpPr>
+        <p:spPr>
+          <a:xfrm>
+            <a:off x="6620256" y="4700016"/>
+            <a:ext cx="2487168" cy="292608"/>
+          </a:xfrm>
+          <a:prstGeom prst="rect">
+            <a:avLst/>
+          </a:prstGeom>
+          <a:noFill/>
+        </p:spPr>
+        <p:txBody>
+          <a:bodyPr wrap="square" lIns="0" rIns="0" tIns="0" bIns="0" anchor="t"/>
+          <a:lstStyle/>
+          <a:p>
+            <a:pPr algn="l">
+              <a:spcBef>
+                <a:spcPts val="0"/>
+              </a:spcBef>
+              <a:spcAft>
+                <a:spcPts val="0"/>
+              </a:spcAft>
+            </a:pPr>
+            <a:r>
+              <a:rPr sz="1100" b="0">
+                <a:solidFill>
+                  <a:srgbClr val="FFFFFF"/>
+                </a:solidFill>
+                <a:latin typeface="Microsoft YaHei"/>
+                <a:ea typeface="Microsoft YaHei"/>
+                <a:cs typeface="Microsoft YaHei"/>
+              </a:rPr>
+              <a:t>单边。LLM-DataDist 拉取和推送 KV。</a:t>
+            </a:r>
+          </a:p>
+        </p:txBody>
+      </p:sp>
+      <p:sp>
+        <p:nvSpPr>
+          <p:cNvPr id="59" name="Rectangle 58"/>
+          <p:cNvSpPr/>
+          <p:nvPr/>
+        </p:nvSpPr>
+        <p:spPr>
+          <a:xfrm>
+            <a:off x="9253728" y="4443984"/>
+            <a:ext cx="2633472" cy="585216"/>
+          </a:xfrm>
+          <a:prstGeom prst="rect">
+            <a:avLst/>
+          </a:prstGeom>
+          <a:solidFill>
+            <a:srgbClr val="0E2A47"/>
+          </a:solidFill>
+          <a:ln>
+            <a:noFill/>
+          </a:ln>
+        </p:spPr>
+        <p:style>
+          <a:lnRef idx="1">
+            <a:schemeClr val="accent1"/>
+          </a:lnRef>
+          <a:fillRef idx="3">
+            <a:schemeClr val="accent1"/>
+          </a:fillRef>
+          <a:effectRef idx="2">
+            <a:schemeClr val="accent1"/>
+          </a:effectRef>
+          <a:fontRef idx="minor">
+            <a:schemeClr val="lt1"/>
+          </a:fontRef>
+        </p:style>
+        <p:txBody>
+          <a:bodyPr rtlCol="0" anchor="ctr"/>
+          <a:lstStyle/>
+          <a:p>
+            <a:pPr algn="ctr"/>
+          </a:p>
+        </p:txBody>
+      </p:sp>
+      <p:sp>
+        <p:nvSpPr>
+          <p:cNvPr id="60" name="TextBox 59"/>
+          <p:cNvSpPr txBox="1"/>
+          <p:nvPr/>
+        </p:nvSpPr>
+        <p:spPr>
+          <a:xfrm>
+            <a:off x="9326880" y="4480560"/>
+            <a:ext cx="2487168" cy="219456"/>
+          </a:xfrm>
+          <a:prstGeom prst="rect">
+            <a:avLst/>
+          </a:prstGeom>
+          <a:noFill/>
+        </p:spPr>
+        <p:txBody>
+          <a:bodyPr wrap="square" lIns="0" rIns="0" tIns="0" bIns="0" anchor="ctr"/>
+          <a:lstStyle/>
+          <a:p>
+            <a:pPr algn="l">
+              <a:spcBef>
+                <a:spcPts val="0"/>
+              </a:spcBef>
+              <a:spcAft>
+                <a:spcPts val="0"/>
+              </a:spcAft>
+            </a:pPr>
+            <a:r>
+              <a:rPr sz="1300" b="1">
+                <a:solidFill>
+                  <a:srgbClr val="FFFFFF"/>
+                </a:solidFill>
+                <a:latin typeface="Microsoft YaHei"/>
+                <a:ea typeface="Microsoft YaHei"/>
+                <a:cs typeface="Microsoft YaHei"/>
+              </a:rPr>
+              <a:t>SHMEM</a:t>
+            </a:r>
+          </a:p>
+        </p:txBody>
+      </p:sp>
+      <p:sp>
+        <p:nvSpPr>
+          <p:cNvPr id="61" name="TextBox 60"/>
+          <p:cNvSpPr txBox="1"/>
+          <p:nvPr/>
+        </p:nvSpPr>
+        <p:spPr>
+          <a:xfrm>
+            <a:off x="9326880" y="4700016"/>
+            <a:ext cx="2487168" cy="292608"/>
+          </a:xfrm>
+          <a:prstGeom prst="rect">
+            <a:avLst/>
+          </a:prstGeom>
+          <a:noFill/>
+        </p:spPr>
+        <p:txBody>
+          <a:bodyPr wrap="square" lIns="0" rIns="0" tIns="0" bIns="0" anchor="t"/>
+          <a:lstStyle/>
+          <a:p>
+            <a:pPr algn="l">
+              <a:spcBef>
+                <a:spcPts val="0"/>
+              </a:spcBef>
+              <a:spcAft>
+                <a:spcPts val="0"/>
+              </a:spcAft>
+            </a:pPr>
+            <a:r>
+              <a:rPr sz="1100" b="0">
+                <a:solidFill>
+                  <a:srgbClr val="FFFFFF"/>
+                </a:solidFill>
+                <a:latin typeface="Microsoft YaHei"/>
+                <a:ea typeface="Microsoft YaHei"/>
+                <a:cs typeface="Microsoft YaHei"/>
+              </a:rPr>
+              <a:t>对称内存。卡间单边访问，给定制算子。</a:t>
+            </a:r>
+          </a:p>
+        </p:txBody>
+      </p:sp>
+      <p:sp>
+        <p:nvSpPr>
+          <p:cNvPr id="62" name="TextBox 61"/>
+          <p:cNvSpPr txBox="1"/>
+          <p:nvPr/>
+        </p:nvSpPr>
+        <p:spPr>
+          <a:xfrm>
+            <a:off x="256032" y="5120640"/>
+            <a:ext cx="841248" cy="365760"/>
           </a:xfrm>
           <a:prstGeom prst="rect">
             <a:avLst/>
@@ -5754,14 +6304,14 @@
       </p:sp>
       <p:sp>
         <p:nvSpPr>
-          <p:cNvPr id="50" name="Rectangle 49"/>
+          <p:cNvPr id="63" name="Rectangle 62"/>
           <p:cNvSpPr/>
           <p:nvPr/>
         </p:nvSpPr>
         <p:spPr>
           <a:xfrm>
-            <a:off x="1133856" y="4956048"/>
-            <a:ext cx="1554480" cy="384048"/>
+            <a:off x="1133856" y="5120640"/>
+            <a:ext cx="1554480" cy="365760"/>
           </a:xfrm>
           <a:prstGeom prst="rect">
             <a:avLst/>
@@ -5815,14 +6365,14 @@
       </p:sp>
       <p:sp>
         <p:nvSpPr>
-          <p:cNvPr id="51" name="Rectangle 50"/>
+          <p:cNvPr id="64" name="Rectangle 63"/>
           <p:cNvSpPr/>
           <p:nvPr/>
         </p:nvSpPr>
         <p:spPr>
           <a:xfrm>
-            <a:off x="2688336" y="4956048"/>
-            <a:ext cx="9198864" cy="384048"/>
+            <a:off x="2688336" y="5120640"/>
+            <a:ext cx="9198864" cy="365760"/>
           </a:xfrm>
           <a:prstGeom prst="rect">
             <a:avLst/>
@@ -5858,14 +6408,14 @@
       </p:sp>
       <p:sp>
         <p:nvSpPr>
-          <p:cNvPr id="52" name="TextBox 51"/>
+          <p:cNvPr id="65" name="TextBox 64"/>
           <p:cNvSpPr txBox="1"/>
           <p:nvPr/>
         </p:nvSpPr>
         <p:spPr>
           <a:xfrm>
-            <a:off x="2798064" y="4956048"/>
-            <a:ext cx="9015984" cy="384048"/>
+            <a:off x="2798064" y="5120640"/>
+            <a:ext cx="9015984" cy="365760"/>
           </a:xfrm>
           <a:prstGeom prst="rect">
             <a:avLst/>
@@ -5893,21 +6443,21 @@
                 <a:ea typeface="Microsoft YaHei"/>
                 <a:cs typeface="Microsoft YaHei"/>
               </a:rPr>
-              <a:t>AscendCL、GE、Runtime、算子库、HCCL、DVPP。推理运行包用 NNRT。</a:t>
-            </a:r>
-          </a:p>
-        </p:txBody>
-      </p:sp>
-      <p:sp>
-        <p:nvSpPr>
-          <p:cNvPr id="53" name="TextBox 52"/>
+              <a:t>AscendCL、GE、Runtime、算子库、DVPP。通信四库也在这一层。推理包是 NNRT。</a:t>
+            </a:r>
+          </a:p>
+        </p:txBody>
+      </p:sp>
+      <p:sp>
+        <p:nvSpPr>
+          <p:cNvPr id="66" name="TextBox 65"/>
           <p:cNvSpPr txBox="1"/>
           <p:nvPr/>
         </p:nvSpPr>
         <p:spPr>
           <a:xfrm>
-            <a:off x="256032" y="5394960"/>
-            <a:ext cx="841248" cy="310896"/>
+            <a:off x="256032" y="5541264"/>
+            <a:ext cx="841248" cy="274320"/>
           </a:xfrm>
           <a:prstGeom prst="rect">
             <a:avLst/>
@@ -5942,14 +6492,14 @@
       </p:sp>
       <p:sp>
         <p:nvSpPr>
-          <p:cNvPr id="54" name="Rectangle 53"/>
+          <p:cNvPr id="67" name="Rectangle 66"/>
           <p:cNvSpPr/>
           <p:nvPr/>
         </p:nvSpPr>
         <p:spPr>
           <a:xfrm>
-            <a:off x="1133856" y="5394960"/>
-            <a:ext cx="1554480" cy="310896"/>
+            <a:off x="1133856" y="5541264"/>
+            <a:ext cx="1554480" cy="274320"/>
           </a:xfrm>
           <a:prstGeom prst="rect">
             <a:avLst/>
@@ -6003,14 +6553,14 @@
       </p:sp>
       <p:sp>
         <p:nvSpPr>
-          <p:cNvPr id="55" name="Rectangle 54"/>
+          <p:cNvPr id="68" name="Rectangle 67"/>
           <p:cNvSpPr/>
           <p:nvPr/>
         </p:nvSpPr>
         <p:spPr>
           <a:xfrm>
-            <a:off x="2688336" y="5394960"/>
-            <a:ext cx="9198864" cy="310896"/>
+            <a:off x="2688336" y="5541264"/>
+            <a:ext cx="9198864" cy="274320"/>
           </a:xfrm>
           <a:prstGeom prst="rect">
             <a:avLst/>
@@ -6046,14 +6596,14 @@
       </p:sp>
       <p:sp>
         <p:nvSpPr>
-          <p:cNvPr id="56" name="TextBox 55"/>
+          <p:cNvPr id="69" name="TextBox 68"/>
           <p:cNvSpPr txBox="1"/>
           <p:nvPr/>
         </p:nvSpPr>
         <p:spPr>
           <a:xfrm>
-            <a:off x="2798064" y="5394960"/>
-            <a:ext cx="9015984" cy="310896"/>
+            <a:off x="2798064" y="5541264"/>
+            <a:ext cx="9015984" cy="274320"/>
           </a:xfrm>
           <a:prstGeom prst="rect">
             <a:avLst/>
@@ -6088,14 +6638,14 @@
       </p:sp>
       <p:sp>
         <p:nvSpPr>
-          <p:cNvPr id="57" name="TextBox 56"/>
+          <p:cNvPr id="70" name="TextBox 69"/>
           <p:cNvSpPr txBox="1"/>
           <p:nvPr/>
         </p:nvSpPr>
         <p:spPr>
           <a:xfrm>
-            <a:off x="256032" y="5760720"/>
-            <a:ext cx="841248" cy="310896"/>
+            <a:off x="256032" y="5870448"/>
+            <a:ext cx="841248" cy="274320"/>
           </a:xfrm>
           <a:prstGeom prst="rect">
             <a:avLst/>
@@ -6130,14 +6680,14 @@
       </p:sp>
       <p:sp>
         <p:nvSpPr>
-          <p:cNvPr id="58" name="Rectangle 57"/>
+          <p:cNvPr id="71" name="Rectangle 70"/>
           <p:cNvSpPr/>
           <p:nvPr/>
         </p:nvSpPr>
         <p:spPr>
           <a:xfrm>
-            <a:off x="1133856" y="5760720"/>
-            <a:ext cx="1554480" cy="310896"/>
+            <a:off x="1133856" y="5870448"/>
+            <a:ext cx="1554480" cy="274320"/>
           </a:xfrm>
           <a:prstGeom prst="rect">
             <a:avLst/>
@@ -6191,14 +6741,14 @@
       </p:sp>
       <p:sp>
         <p:nvSpPr>
-          <p:cNvPr id="59" name="Rectangle 58"/>
+          <p:cNvPr id="72" name="Rectangle 71"/>
           <p:cNvSpPr/>
           <p:nvPr/>
         </p:nvSpPr>
         <p:spPr>
           <a:xfrm>
-            <a:off x="2688336" y="5760720"/>
-            <a:ext cx="9198864" cy="310896"/>
+            <a:off x="2688336" y="5870448"/>
+            <a:ext cx="9198864" cy="274320"/>
           </a:xfrm>
           <a:prstGeom prst="rect">
             <a:avLst/>
@@ -6234,14 +6784,14 @@
       </p:sp>
       <p:sp>
         <p:nvSpPr>
-          <p:cNvPr id="60" name="TextBox 59"/>
+          <p:cNvPr id="73" name="TextBox 72"/>
           <p:cNvSpPr txBox="1"/>
           <p:nvPr/>
         </p:nvSpPr>
         <p:spPr>
           <a:xfrm>
-            <a:off x="2798064" y="5760720"/>
-            <a:ext cx="9015984" cy="310896"/>
+            <a:off x="2798064" y="5870448"/>
+            <a:ext cx="9015984" cy="274320"/>
           </a:xfrm>
           <a:prstGeom prst="rect">
             <a:avLst/>
@@ -6276,14 +6826,14 @@
       </p:sp>
       <p:sp>
         <p:nvSpPr>
-          <p:cNvPr id="61" name="TextBox 60"/>
+          <p:cNvPr id="74" name="TextBox 73"/>
           <p:cNvSpPr txBox="1"/>
           <p:nvPr/>
         </p:nvSpPr>
         <p:spPr>
           <a:xfrm>
-            <a:off x="292608" y="6126480"/>
-            <a:ext cx="11612880" cy="585216"/>
+            <a:off x="292608" y="6199632"/>
+            <a:ext cx="11612880" cy="530352"/>
           </a:xfrm>
           <a:prstGeom prst="rect">
             <a:avLst/>
@@ -6311,7 +6861,7 @@
                 <a:ea typeface="Microsoft YaHei"/>
                 <a:cs typeface="Microsoft YaHei"/>
               </a:rPr>
-              <a:t>Mooncake 不是调用链上的一层。Conductor 把 KV 位置交给 Coordinator 做亲和调度；Store 和 connector 挂在引擎侧。</a:t>
+              <a:t>HCCL 走集合，服务模型并行。HIXL 走单边，服务 P 到 D 的 KV。按层池化目前只在 MemCache 上。</a:t>
             </a:r>
           </a:p>
           <a:p>
@@ -6332,7 +6882,7 @@
                 <a:ea typeface="Microsoft YaHei"/>
                 <a:cs typeface="Microsoft YaHei"/>
               </a:rPr>
-              <a:t>池化还可选 MemCache。亲和调度与按层推入共享池是两套配置，不叠在同一次传输上。</a:t>
+              <a:t>HCOMM 是文档里的通信基础库名。MemCache、Mooncake、YuanRong 是池后端，不是三条调用链。</a:t>
             </a:r>
           </a:p>
         </p:txBody>

--- a/docs/ascend-infer-stack.pptx
+++ b/docs/ascend-infer-stack.pptx
@@ -502,7 +502,7 @@
           <a:lstStyle/>
           <a:p>
             <a:r>
-              <a:t>依据 MindIE 3.1 用户手册 Overview 与 MindIE Motor 3.1 架构说明。MindIE LLM 进入维护，官方建议新部署使用 MindIE Motor 加 vLLM-Ascend。MindIE LLM 自上而下为 Server、LLM Manager、Text Generator、Modeling。LLM Manager 内的 Engine 编排 Scheduler、Executor 和 Worker；Block Manager 管 KV 池。Executor 把调度结果下发给 Text Generator，覆盖跨节点、跨设备。Text Generator 含前处理、Generator、Sampler，并支持可插拔的并行解码。Modeling 提供 ATB Models；开发者架构说明同时支持 ACLGraph 和 ATBGraph。Motor：Coordinator 为数据面入口；Controller 与 NodeManager 为管控面；EngineServer 北向接二者，南向当前仅 vLLM。架构页写明南向接口包括 vLLM、SGLang 和 MindIE，当前版本只支持 vLLM。MindCluster 提供 Kubernetes、PD 分离 CRD 和 Operator，位于调用链外侧。CCAE 可选。CANN 组成沿用方案概述：AscendCL、GE、Runtime、算子库、HCCL、DVPP。推理运行包为 NNRT。KV 池：Motor 3.1 默认后端是 MemCache，由 MetaService 管元数据、LocalService 管 DRAM；Mooncake 用 mooncake_master；还有 YuanRong。vLLM-Ascend 的按层池化目前只支持 MemCache。Mooncake Conductor 给 Coordinator 提供 KV 位置，用于亲和调度。通信库都在 CANN 内。HCCL 是集合通信库，服务张量并行和专家并行；HCOMM 是它的基础库，控制面管拓扑和资源，数据面管搬运和同步。HIXL 是单边通信库，LLM-DataDist 在这里做链路和 KV 的拉取、推送，支持 D2D、D2H、H2D。SHMEM 是对称内存库，给算子开发提供卡间单边访问。用户所说的 HCOM 对应文档名 HCOMM。</a:t>
+              <a:t>依据 MindIE 3.1 用户手册 Overview 与 MindIE Motor 3.1 架构说明。MindIE LLM 进入维护，官方建议新部署使用 MindIE Motor 加 vLLM-Ascend。MindIE LLM 自上而下为 Server、LLM Manager、Text Generator、Modeling。LLM Manager 内的 Engine 编排 Scheduler、Executor 和 Worker；Block Manager 管 KV 池。Executor 把调度结果下发给 Text Generator，覆盖跨节点、跨设备。Text Generator 含前处理、Generator、Sampler，并支持可插拔的并行解码。Modeling 提供 ATB Models；开发者架构说明同时支持 ACLGraph 和 ATBGraph。Motor：Coordinator 为数据面入口；Controller 与 NodeManager 为管控面；EngineServer 北向接二者，南向当前仅 vLLM。架构页写明南向接口包括 vLLM、SGLang 和 MindIE，当前版本只支持 vLLM。MindCluster 提供 Kubernetes、PD 分离 CRD 和 Operator，位于调用链外侧。CCAE 可选。CANN 组成沿用方案概述：AscendCL、GE、Runtime、算子库、HCCL、DVPP。推理运行包为 NNRT。KV 池与传输不是并列关系。AscendStoreConnector.backend 在 memcache、mooncake、yuanrong 里选一个池。MemCache 是 Motor 3.1 默认池：MetaService 管元数据，LocalService 管 DRAM。它的字节走 MemFabric，协议有 device_rdma（A2）、device_sdma（A3）、host_rdma、device_urma（950）、同节点 host_shm。Mooncake 是对象层，mooncake_master 管池。昇腾上的字节走 Ascend Direct（adxl），建在 CANN 的 HIXL 上。ASCEND_USE_ASYNC_TRANSFER 打开 HIXL 异步传输。LLM-DataDist 是 HIXL 上的 KV 接口，做链路和 pull、push，覆盖 D2D、D2H、H2D。Conductor 只是位置索引，Coordinator 用它做亲和调度，字节不经过 Conductor。YuanRong 是第三种池后端。按层池化目前只支持 MemCache。HCCL 是集合通信，服务张量并行和专家并行。HCOMM 是 HCCL 的基础库，控制面管拓扑和资源，数据面管搬运和同步。用户所说的 HCOM 对应文档名 HCOMM。CANN SHMEM（aclshmem）是算子用的对称内存。仓库示例 kv_shuffle 做跨 PE 的 KV 块拷贝，不在默认服务路径上。MindIE 的 SharedMemCommunication 和 layerwise 的 share_memory 使用主机 POSIX 共享内存传控制标志，不是 CANN SHMEM。</a:t>
             </a:r>
           </a:p>
         </p:txBody>
@@ -3601,8 +3601,8 @@
         </p:nvSpPr>
         <p:spPr>
           <a:xfrm>
-            <a:off x="292608" y="365760"/>
-            <a:ext cx="11612880" cy="365760"/>
+            <a:off x="292608" y="347472"/>
+            <a:ext cx="11612880" cy="329184"/>
           </a:xfrm>
           <a:prstGeom prst="rect">
             <a:avLst/>
@@ -3622,7 +3622,7 @@
               </a:spcAft>
             </a:pPr>
             <a:r>
-              <a:rPr sz="2400" b="1">
+              <a:rPr sz="2200" b="1">
                 <a:solidFill>
                   <a:srgbClr val="0E2A47"/>
                 </a:solidFill>
@@ -3630,7 +3630,7 @@
                 <a:ea typeface="Microsoft YaHei"/>
                 <a:cs typeface="Microsoft YaHei"/>
               </a:rPr>
-              <a:t>两条推理路径在 CANN 汇合，下面共用 HDK 和 NPU</a:t>
+              <a:t>Mooncake 的字节走 HIXL，MemCache 的字节走 MemFabric</a:t>
             </a:r>
           </a:p>
         </p:txBody>
@@ -3643,8 +3643,8 @@
         </p:nvSpPr>
         <p:spPr>
           <a:xfrm>
-            <a:off x="292608" y="768096"/>
-            <a:ext cx="11612880" cy="292608"/>
+            <a:off x="292608" y="694944"/>
+            <a:ext cx="11612880" cy="274320"/>
           </a:xfrm>
           <a:prstGeom prst="rect">
             <a:avLst/>
@@ -3664,7 +3664,7 @@
               </a:spcAft>
             </a:pPr>
             <a:r>
-              <a:rPr sz="1500" b="0">
+              <a:rPr sz="1400" b="0">
                 <a:solidFill>
                   <a:srgbClr val="1C242E"/>
                 </a:solidFill>
@@ -3672,7 +3672,7 @@
                 <a:ea typeface="Microsoft YaHei"/>
                 <a:cs typeface="Microsoft YaHei"/>
               </a:rPr>
-              <a:t>新部署走 MindIE Motor，南向当前是 vLLM-Ascend。MindIE LLM 仍保留原生层次，已进入维护。</a:t>
+              <a:t>两条服务在 CANN 汇合。默认推理不调用 SHMEM。HCOMM 是 HCCL 的基础库。</a:t>
             </a:r>
           </a:p>
         </p:txBody>
@@ -3685,8 +3685,8 @@
         </p:nvSpPr>
         <p:spPr>
           <a:xfrm>
-            <a:off x="256032" y="1115568"/>
-            <a:ext cx="841248" cy="329184"/>
+            <a:off x="256032" y="1024128"/>
+            <a:ext cx="841248" cy="274320"/>
           </a:xfrm>
           <a:prstGeom prst="rect">
             <a:avLst/>
@@ -3706,7 +3706,7 @@
               </a:spcAft>
             </a:pPr>
             <a:r>
-              <a:rPr sz="1300" b="1">
+              <a:rPr sz="1200" b="1">
                 <a:solidFill>
                   <a:srgbClr val="7A541C"/>
                 </a:solidFill>
@@ -3727,8 +3727,8 @@
         </p:nvSpPr>
         <p:spPr>
           <a:xfrm>
-            <a:off x="1133856" y="1115568"/>
-            <a:ext cx="1554480" cy="329184"/>
+            <a:off x="1133856" y="1024128"/>
+            <a:ext cx="1554480" cy="274320"/>
           </a:xfrm>
           <a:prstGeom prst="rect">
             <a:avLst/>
@@ -3788,8 +3788,8 @@
         </p:nvSpPr>
         <p:spPr>
           <a:xfrm>
-            <a:off x="2688336" y="1115568"/>
-            <a:ext cx="9198864" cy="329184"/>
+            <a:off x="2688336" y="1024128"/>
+            <a:ext cx="9198864" cy="274320"/>
           </a:xfrm>
           <a:prstGeom prst="rect">
             <a:avLst/>
@@ -3831,8 +3831,8 @@
         </p:nvSpPr>
         <p:spPr>
           <a:xfrm>
-            <a:off x="2798064" y="1115568"/>
-            <a:ext cx="9015984" cy="329184"/>
+            <a:off x="2798064" y="1024128"/>
+            <a:ext cx="9015984" cy="274320"/>
           </a:xfrm>
           <a:prstGeom prst="rect">
             <a:avLst/>
@@ -3873,8 +3873,8 @@
         </p:nvSpPr>
         <p:spPr>
           <a:xfrm>
-            <a:off x="256032" y="1517904"/>
-            <a:ext cx="841248" cy="2267712"/>
+            <a:off x="256032" y="1353312"/>
+            <a:ext cx="841248" cy="1975104"/>
           </a:xfrm>
           <a:prstGeom prst="rect">
             <a:avLst/>
@@ -3894,7 +3894,7 @@
               </a:spcAft>
             </a:pPr>
             <a:r>
-              <a:rPr sz="1300" b="1">
+              <a:rPr sz="1200" b="1">
                 <a:solidFill>
                   <a:srgbClr val="0E7A76"/>
                 </a:solidFill>
@@ -3915,8 +3915,8 @@
         </p:nvSpPr>
         <p:spPr>
           <a:xfrm>
-            <a:off x="1133856" y="1517904"/>
-            <a:ext cx="5321808" cy="2267712"/>
+            <a:off x="1133856" y="1353312"/>
+            <a:ext cx="5321808" cy="1975104"/>
           </a:xfrm>
           <a:prstGeom prst="rect">
             <a:avLst/>
@@ -3960,7 +3960,7 @@
         </p:nvSpPr>
         <p:spPr>
           <a:xfrm>
-            <a:off x="1133856" y="1517904"/>
+            <a:off x="1133856" y="1353312"/>
             <a:ext cx="5321808" cy="310896"/>
           </a:xfrm>
           <a:prstGeom prst="rect">
@@ -4008,7 +4008,7 @@
                 <a:ea typeface="Microsoft YaHei"/>
                 <a:cs typeface="Microsoft YaHei"/>
               </a:rPr>
-              <a:t>路径 A  ·  MindIE LLM 原生引擎</a:t>
+              <a:t>路径 A  ·  MindIE LLM</a:t>
             </a:r>
           </a:p>
         </p:txBody>
@@ -4021,8 +4021,8 @@
         </p:nvSpPr>
         <p:spPr>
           <a:xfrm>
-            <a:off x="1207008" y="1901952"/>
-            <a:ext cx="1627632" cy="411480"/>
+            <a:off x="1207008" y="1737360"/>
+            <a:ext cx="1627632" cy="338328"/>
           </a:xfrm>
           <a:prstGeom prst="rect">
             <a:avLst/>
@@ -4082,8 +4082,8 @@
         </p:nvSpPr>
         <p:spPr>
           <a:xfrm>
-            <a:off x="2834640" y="1901952"/>
-            <a:ext cx="3547872" cy="411480"/>
+            <a:off x="2834640" y="1737360"/>
+            <a:ext cx="3547872" cy="338328"/>
           </a:xfrm>
           <a:prstGeom prst="rect">
             <a:avLst/>
@@ -4125,8 +4125,8 @@
         </p:nvSpPr>
         <p:spPr>
           <a:xfrm>
-            <a:off x="2926080" y="1901952"/>
-            <a:ext cx="3419856" cy="411480"/>
+            <a:off x="2926080" y="1737360"/>
+            <a:ext cx="3419856" cy="338328"/>
           </a:xfrm>
           <a:prstGeom prst="rect">
             <a:avLst/>
@@ -4154,7 +4154,7 @@
                 <a:ea typeface="Microsoft YaHei"/>
                 <a:cs typeface="Microsoft YaHei"/>
               </a:rPr>
-              <a:t>Endpoint 兼容 OpenAI、vLLM、Triton、TGI。</a:t>
+              <a:t>OpenAI、vLLM、Triton、TGI。</a:t>
             </a:r>
           </a:p>
         </p:txBody>
@@ -4167,8 +4167,8 @@
         </p:nvSpPr>
         <p:spPr>
           <a:xfrm>
-            <a:off x="1207008" y="2368296"/>
-            <a:ext cx="1627632" cy="411480"/>
+            <a:off x="1207008" y="2130552"/>
+            <a:ext cx="1627632" cy="338328"/>
           </a:xfrm>
           <a:prstGeom prst="rect">
             <a:avLst/>
@@ -4228,8 +4228,8 @@
         </p:nvSpPr>
         <p:spPr>
           <a:xfrm>
-            <a:off x="2834640" y="2368296"/>
-            <a:ext cx="3547872" cy="411480"/>
+            <a:off x="2834640" y="2130552"/>
+            <a:ext cx="3547872" cy="338328"/>
           </a:xfrm>
           <a:prstGeom prst="rect">
             <a:avLst/>
@@ -4271,8 +4271,8 @@
         </p:nvSpPr>
         <p:spPr>
           <a:xfrm>
-            <a:off x="2926080" y="2368296"/>
-            <a:ext cx="3419856" cy="411480"/>
+            <a:off x="2926080" y="2130552"/>
+            <a:ext cx="3419856" cy="338328"/>
           </a:xfrm>
           <a:prstGeom prst="rect">
             <a:avLst/>
@@ -4300,7 +4300,7 @@
                 <a:ea typeface="Microsoft YaHei"/>
                 <a:cs typeface="Microsoft YaHei"/>
               </a:rPr>
-              <a:t>连续组批。Engine 内含 Scheduler。</a:t>
+              <a:t>连续组批。Engine 含 Scheduler。</a:t>
             </a:r>
           </a:p>
         </p:txBody>
@@ -4313,8 +4313,8 @@
         </p:nvSpPr>
         <p:spPr>
           <a:xfrm>
-            <a:off x="1207008" y="2834640"/>
-            <a:ext cx="1627632" cy="411480"/>
+            <a:off x="1207008" y="2523744"/>
+            <a:ext cx="1627632" cy="338328"/>
           </a:xfrm>
           <a:prstGeom prst="rect">
             <a:avLst/>
@@ -4374,8 +4374,8 @@
         </p:nvSpPr>
         <p:spPr>
           <a:xfrm>
-            <a:off x="2834640" y="2834640"/>
-            <a:ext cx="3547872" cy="411480"/>
+            <a:off x="2834640" y="2523744"/>
+            <a:ext cx="3547872" cy="338328"/>
           </a:xfrm>
           <a:prstGeom prst="rect">
             <a:avLst/>
@@ -4417,8 +4417,8 @@
         </p:nvSpPr>
         <p:spPr>
           <a:xfrm>
-            <a:off x="2926080" y="2834640"/>
-            <a:ext cx="3419856" cy="411480"/>
+            <a:off x="2926080" y="2523744"/>
+            <a:ext cx="3419856" cy="338328"/>
           </a:xfrm>
           <a:prstGeom prst="rect">
             <a:avLst/>
@@ -4446,7 +4446,7 @@
                 <a:ea typeface="Microsoft YaHei"/>
                 <a:cs typeface="Microsoft YaHei"/>
               </a:rPr>
-              <a:t>自回归执行。Executor 负责跨节点下发。</a:t>
+              <a:t>自回归。Executor 跨节点下发。</a:t>
             </a:r>
           </a:p>
         </p:txBody>
@@ -4459,8 +4459,8 @@
         </p:nvSpPr>
         <p:spPr>
           <a:xfrm>
-            <a:off x="1207008" y="3300984"/>
-            <a:ext cx="1627632" cy="411480"/>
+            <a:off x="1207008" y="2916936"/>
+            <a:ext cx="1627632" cy="338328"/>
           </a:xfrm>
           <a:prstGeom prst="rect">
             <a:avLst/>
@@ -4520,8 +4520,8 @@
         </p:nvSpPr>
         <p:spPr>
           <a:xfrm>
-            <a:off x="2834640" y="3300984"/>
-            <a:ext cx="3547872" cy="411480"/>
+            <a:off x="2834640" y="2916936"/>
+            <a:ext cx="3547872" cy="338328"/>
           </a:xfrm>
           <a:prstGeom prst="rect">
             <a:avLst/>
@@ -4563,8 +4563,8 @@
         </p:nvSpPr>
         <p:spPr>
           <a:xfrm>
-            <a:off x="2926080" y="3300984"/>
-            <a:ext cx="3419856" cy="411480"/>
+            <a:off x="2926080" y="2916936"/>
+            <a:ext cx="3419856" cy="338328"/>
           </a:xfrm>
           <a:prstGeom prst="rect">
             <a:avLst/>
@@ -4605,8 +4605,8 @@
         </p:nvSpPr>
         <p:spPr>
           <a:xfrm>
-            <a:off x="6565392" y="1517904"/>
-            <a:ext cx="5321808" cy="2267712"/>
+            <a:off x="6565392" y="1353312"/>
+            <a:ext cx="5321808" cy="1975104"/>
           </a:xfrm>
           <a:prstGeom prst="rect">
             <a:avLst/>
@@ -4650,7 +4650,7 @@
         </p:nvSpPr>
         <p:spPr>
           <a:xfrm>
-            <a:off x="6565392" y="1517904"/>
+            <a:off x="6565392" y="1353312"/>
             <a:ext cx="5321808" cy="310896"/>
           </a:xfrm>
           <a:prstGeom prst="rect">
@@ -4711,8 +4711,8 @@
         </p:nvSpPr>
         <p:spPr>
           <a:xfrm>
-            <a:off x="6638544" y="1901952"/>
-            <a:ext cx="1627632" cy="411480"/>
+            <a:off x="6638544" y="1737360"/>
+            <a:ext cx="1627632" cy="338328"/>
           </a:xfrm>
           <a:prstGeom prst="rect">
             <a:avLst/>
@@ -4772,8 +4772,8 @@
         </p:nvSpPr>
         <p:spPr>
           <a:xfrm>
-            <a:off x="8266176" y="1901952"/>
-            <a:ext cx="3547872" cy="411480"/>
+            <a:off x="8266176" y="1737360"/>
+            <a:ext cx="3547872" cy="338328"/>
           </a:xfrm>
           <a:prstGeom prst="rect">
             <a:avLst/>
@@ -4815,8 +4815,8 @@
         </p:nvSpPr>
         <p:spPr>
           <a:xfrm>
-            <a:off x="8357616" y="1901952"/>
-            <a:ext cx="3419856" cy="411480"/>
+            <a:off x="8357616" y="1737360"/>
+            <a:ext cx="3419856" cy="338328"/>
           </a:xfrm>
           <a:prstGeom prst="rect">
             <a:avLst/>
@@ -4857,8 +4857,8 @@
         </p:nvSpPr>
         <p:spPr>
           <a:xfrm>
-            <a:off x="6638544" y="2368296"/>
-            <a:ext cx="1627632" cy="411480"/>
+            <a:off x="6638544" y="2130552"/>
+            <a:ext cx="1627632" cy="338328"/>
           </a:xfrm>
           <a:prstGeom prst="rect">
             <a:avLst/>
@@ -4918,8 +4918,8 @@
         </p:nvSpPr>
         <p:spPr>
           <a:xfrm>
-            <a:off x="8266176" y="2368296"/>
-            <a:ext cx="3547872" cy="411480"/>
+            <a:off x="8266176" y="2130552"/>
+            <a:ext cx="3547872" cy="338328"/>
           </a:xfrm>
           <a:prstGeom prst="rect">
             <a:avLst/>
@@ -4961,8 +4961,8 @@
         </p:nvSpPr>
         <p:spPr>
           <a:xfrm>
-            <a:off x="8357616" y="2368296"/>
-            <a:ext cx="3419856" cy="411480"/>
+            <a:off x="8357616" y="2130552"/>
+            <a:ext cx="3419856" cy="338328"/>
           </a:xfrm>
           <a:prstGeom prst="rect">
             <a:avLst/>
@@ -5003,8 +5003,8 @@
         </p:nvSpPr>
         <p:spPr>
           <a:xfrm>
-            <a:off x="6638544" y="2834640"/>
-            <a:ext cx="1627632" cy="411480"/>
+            <a:off x="6638544" y="2523744"/>
+            <a:ext cx="1627632" cy="338328"/>
           </a:xfrm>
           <a:prstGeom prst="rect">
             <a:avLst/>
@@ -5064,8 +5064,8 @@
         </p:nvSpPr>
         <p:spPr>
           <a:xfrm>
-            <a:off x="8266176" y="2834640"/>
-            <a:ext cx="3547872" cy="411480"/>
+            <a:off x="8266176" y="2523744"/>
+            <a:ext cx="3547872" cy="338328"/>
           </a:xfrm>
           <a:prstGeom prst="rect">
             <a:avLst/>
@@ -5107,8 +5107,8 @@
         </p:nvSpPr>
         <p:spPr>
           <a:xfrm>
-            <a:off x="8357616" y="2834640"/>
-            <a:ext cx="3419856" cy="411480"/>
+            <a:off x="8357616" y="2523744"/>
+            <a:ext cx="3419856" cy="338328"/>
           </a:xfrm>
           <a:prstGeom prst="rect">
             <a:avLst/>
@@ -5136,7 +5136,7 @@
                 <a:ea typeface="Microsoft YaHei"/>
                 <a:cs typeface="Microsoft YaHei"/>
               </a:rPr>
-              <a:t>北向接 Coordinator 和 Controller。</a:t>
+              <a:t>北向接 Coordinator、Controller。</a:t>
             </a:r>
           </a:p>
         </p:txBody>
@@ -5149,8 +5149,8 @@
         </p:nvSpPr>
         <p:spPr>
           <a:xfrm>
-            <a:off x="6638544" y="3300984"/>
-            <a:ext cx="1627632" cy="411480"/>
+            <a:off x="6638544" y="2916936"/>
+            <a:ext cx="1627632" cy="338328"/>
           </a:xfrm>
           <a:prstGeom prst="rect">
             <a:avLst/>
@@ -5210,8 +5210,8 @@
         </p:nvSpPr>
         <p:spPr>
           <a:xfrm>
-            <a:off x="8266176" y="3300984"/>
-            <a:ext cx="3547872" cy="411480"/>
+            <a:off x="8266176" y="2916936"/>
+            <a:ext cx="3547872" cy="338328"/>
           </a:xfrm>
           <a:prstGeom prst="rect">
             <a:avLst/>
@@ -5253,8 +5253,8 @@
         </p:nvSpPr>
         <p:spPr>
           <a:xfrm>
-            <a:off x="8357616" y="3300984"/>
-            <a:ext cx="3419856" cy="411480"/>
+            <a:off x="8357616" y="2916936"/>
+            <a:ext cx="3419856" cy="338328"/>
           </a:xfrm>
           <a:prstGeom prst="rect">
             <a:avLst/>
@@ -5282,7 +5282,7 @@
                 <a:ea typeface="Microsoft YaHei"/>
                 <a:cs typeface="Microsoft YaHei"/>
               </a:rPr>
-              <a:t>当前唯一南向。前向和实例内组批。</a:t>
+              <a:t>当前唯一南向。前向与组批。</a:t>
             </a:r>
           </a:p>
         </p:txBody>
@@ -5295,8 +5295,8 @@
         </p:nvSpPr>
         <p:spPr>
           <a:xfrm>
-            <a:off x="256032" y="3858768"/>
-            <a:ext cx="841248" cy="512064"/>
+            <a:off x="256032" y="3401568"/>
+            <a:ext cx="841248" cy="950976"/>
           </a:xfrm>
           <a:prstGeom prst="rect">
             <a:avLst/>
@@ -5324,7 +5324,7 @@
                 <a:ea typeface="Microsoft YaHei"/>
                 <a:cs typeface="Microsoft YaHei"/>
               </a:rPr>
-              <a:t>KV 池</a:t>
+              <a:t>KV</a:t>
             </a:r>
           </a:p>
         </p:txBody>
@@ -5337,8 +5337,8 @@
         </p:nvSpPr>
         <p:spPr>
           <a:xfrm>
-            <a:off x="1133856" y="3858768"/>
-            <a:ext cx="3535680" cy="512064"/>
+            <a:off x="1133856" y="3401568"/>
+            <a:ext cx="3523488" cy="384048"/>
           </a:xfrm>
           <a:prstGeom prst="rect">
             <a:avLst/>
@@ -5380,8 +5380,8 @@
         </p:nvSpPr>
         <p:spPr>
           <a:xfrm>
-            <a:off x="1207008" y="3895344"/>
-            <a:ext cx="3389376" cy="219456"/>
+            <a:off x="1207008" y="3410712"/>
+            <a:ext cx="3377184" cy="182880"/>
           </a:xfrm>
           <a:prstGeom prst="rect">
             <a:avLst/>
@@ -5409,7 +5409,7 @@
                 <a:ea typeface="Microsoft YaHei"/>
                 <a:cs typeface="Microsoft YaHei"/>
               </a:rPr>
-              <a:t>MemCache</a:t>
+              <a:t>池  MemCache</a:t>
             </a:r>
           </a:p>
         </p:txBody>
@@ -5422,8 +5422,8 @@
         </p:nvSpPr>
         <p:spPr>
           <a:xfrm>
-            <a:off x="1207008" y="4114800"/>
-            <a:ext cx="3389376" cy="219456"/>
+            <a:off x="1207008" y="3593592"/>
+            <a:ext cx="3377184" cy="182880"/>
           </a:xfrm>
           <a:prstGeom prst="rect">
             <a:avLst/>
@@ -5431,7 +5431,7 @@
           <a:noFill/>
         </p:spPr>
         <p:txBody>
-          <a:bodyPr wrap="square" lIns="0" rIns="0" tIns="0" bIns="0" anchor="t"/>
+          <a:bodyPr wrap="square" lIns="0" rIns="0" tIns="0" bIns="0" anchor="ctr"/>
           <a:lstStyle/>
           <a:p>
             <a:pPr algn="l">
@@ -5458,20 +5458,20 @@
       </p:sp>
       <p:sp>
         <p:nvSpPr>
-          <p:cNvPr id="43" name="Rectangle 42"/>
+          <p:cNvPr id="43" name="Down Arrow 42"/>
           <p:cNvSpPr/>
           <p:nvPr/>
         </p:nvSpPr>
         <p:spPr>
           <a:xfrm>
-            <a:off x="4742688" y="3858768"/>
-            <a:ext cx="3535680" cy="512064"/>
-          </a:xfrm>
-          <a:prstGeom prst="rect">
+            <a:off x="2813304" y="3785616"/>
+            <a:ext cx="164592" cy="146304"/>
+          </a:xfrm>
+          <a:prstGeom prst="downArrow">
             <a:avLst/>
           </a:prstGeom>
           <a:solidFill>
-            <a:srgbClr val="7A541C"/>
+            <a:srgbClr val="0E7A76"/>
           </a:solidFill>
           <a:ln>
             <a:noFill/>
@@ -5501,14 +5501,57 @@
       </p:sp>
       <p:sp>
         <p:nvSpPr>
-          <p:cNvPr id="44" name="TextBox 43"/>
+          <p:cNvPr id="44" name="Rectangle 43"/>
+          <p:cNvSpPr/>
+          <p:nvPr/>
+        </p:nvSpPr>
+        <p:spPr>
+          <a:xfrm>
+            <a:off x="1133856" y="3931920"/>
+            <a:ext cx="3523488" cy="420624"/>
+          </a:xfrm>
+          <a:prstGeom prst="rect">
+            <a:avLst/>
+          </a:prstGeom>
+          <a:solidFill>
+            <a:srgbClr val="0E7A76"/>
+          </a:solidFill>
+          <a:ln>
+            <a:noFill/>
+          </a:ln>
+        </p:spPr>
+        <p:style>
+          <a:lnRef idx="1">
+            <a:schemeClr val="accent1"/>
+          </a:lnRef>
+          <a:fillRef idx="3">
+            <a:schemeClr val="accent1"/>
+          </a:fillRef>
+          <a:effectRef idx="2">
+            <a:schemeClr val="accent1"/>
+          </a:effectRef>
+          <a:fontRef idx="minor">
+            <a:schemeClr val="lt1"/>
+          </a:fontRef>
+        </p:style>
+        <p:txBody>
+          <a:bodyPr rtlCol="0" anchor="ctr"/>
+          <a:lstStyle/>
+          <a:p>
+            <a:pPr algn="ctr"/>
+          </a:p>
+        </p:txBody>
+      </p:sp>
+      <p:sp>
+        <p:nvSpPr>
+          <p:cNvPr id="45" name="TextBox 44"/>
           <p:cNvSpPr txBox="1"/>
           <p:nvPr/>
         </p:nvSpPr>
         <p:spPr>
           <a:xfrm>
-            <a:off x="4815840" y="3895344"/>
-            <a:ext cx="3389376" cy="219456"/>
+            <a:off x="1207008" y="3950208"/>
+            <a:ext cx="3377184" cy="182880"/>
           </a:xfrm>
           <a:prstGeom prst="rect">
             <a:avLst/>
@@ -5536,21 +5579,21 @@
                 <a:ea typeface="Microsoft YaHei"/>
                 <a:cs typeface="Microsoft YaHei"/>
               </a:rPr>
-              <a:t>Mooncake</a:t>
-            </a:r>
-          </a:p>
-        </p:txBody>
-      </p:sp>
-      <p:sp>
-        <p:nvSpPr>
-          <p:cNvPr id="45" name="TextBox 44"/>
+              <a:t>传输  MemFabric</a:t>
+            </a:r>
+          </a:p>
+        </p:txBody>
+      </p:sp>
+      <p:sp>
+        <p:nvSpPr>
+          <p:cNvPr id="46" name="TextBox 45"/>
           <p:cNvSpPr txBox="1"/>
           <p:nvPr/>
         </p:nvSpPr>
         <p:spPr>
           <a:xfrm>
-            <a:off x="4815840" y="4114800"/>
-            <a:ext cx="3389376" cy="219456"/>
+            <a:off x="1207008" y="4133088"/>
+            <a:ext cx="3377184" cy="201168"/>
           </a:xfrm>
           <a:prstGeom prst="rect">
             <a:avLst/>
@@ -5558,7 +5601,7 @@
           <a:noFill/>
         </p:spPr>
         <p:txBody>
-          <a:bodyPr wrap="square" lIns="0" rIns="0" tIns="0" bIns="0" anchor="t"/>
+          <a:bodyPr wrap="square" lIns="0" rIns="0" tIns="0" bIns="0" anchor="ctr"/>
           <a:lstStyle/>
           <a:p>
             <a:pPr algn="l">
@@ -5578,27 +5621,27 @@
                 <a:ea typeface="Microsoft YaHei"/>
                 <a:cs typeface="Microsoft YaHei"/>
               </a:rPr>
-              <a:t>mooncake_master。Conductor 管 KV 位置。</a:t>
-            </a:r>
-          </a:p>
-        </p:txBody>
-      </p:sp>
-      <p:sp>
-        <p:nvSpPr>
-          <p:cNvPr id="46" name="Rectangle 45"/>
+              <a:t>rdma、sdma、urma、host_shm。</a:t>
+            </a:r>
+          </a:p>
+        </p:txBody>
+      </p:sp>
+      <p:sp>
+        <p:nvSpPr>
+          <p:cNvPr id="47" name="Rectangle 46"/>
           <p:cNvSpPr/>
           <p:nvPr/>
         </p:nvSpPr>
         <p:spPr>
           <a:xfrm>
-            <a:off x="8351520" y="3858768"/>
-            <a:ext cx="3535680" cy="512064"/>
+            <a:off x="4748784" y="3401568"/>
+            <a:ext cx="3523488" cy="384048"/>
           </a:xfrm>
           <a:prstGeom prst="rect">
             <a:avLst/>
           </a:prstGeom>
           <a:solidFill>
-            <a:srgbClr val="0E7A76"/>
+            <a:srgbClr val="7A541C"/>
           </a:solidFill>
           <a:ln>
             <a:noFill/>
@@ -5628,14 +5671,14 @@
       </p:sp>
       <p:sp>
         <p:nvSpPr>
-          <p:cNvPr id="47" name="TextBox 46"/>
+          <p:cNvPr id="48" name="TextBox 47"/>
           <p:cNvSpPr txBox="1"/>
           <p:nvPr/>
         </p:nvSpPr>
         <p:spPr>
           <a:xfrm>
-            <a:off x="8424672" y="3895344"/>
-            <a:ext cx="3389376" cy="219456"/>
+            <a:off x="4821936" y="3410712"/>
+            <a:ext cx="3377184" cy="182880"/>
           </a:xfrm>
           <a:prstGeom prst="rect">
             <a:avLst/>
@@ -5663,21 +5706,21 @@
                 <a:ea typeface="Microsoft YaHei"/>
                 <a:cs typeface="Microsoft YaHei"/>
               </a:rPr>
-              <a:t>实例内</a:t>
-            </a:r>
-          </a:p>
-        </p:txBody>
-      </p:sp>
-      <p:sp>
-        <p:nvSpPr>
-          <p:cNvPr id="48" name="TextBox 47"/>
+              <a:t>池  Mooncake</a:t>
+            </a:r>
+          </a:p>
+        </p:txBody>
+      </p:sp>
+      <p:sp>
+        <p:nvSpPr>
+          <p:cNvPr id="49" name="TextBox 48"/>
           <p:cNvSpPr txBox="1"/>
           <p:nvPr/>
         </p:nvSpPr>
         <p:spPr>
           <a:xfrm>
-            <a:off x="8424672" y="4114800"/>
-            <a:ext cx="3389376" cy="219456"/>
+            <a:off x="4821936" y="3593592"/>
+            <a:ext cx="3377184" cy="182880"/>
           </a:xfrm>
           <a:prstGeom prst="rect">
             <a:avLst/>
@@ -5685,7 +5728,7 @@
           <a:noFill/>
         </p:spPr>
         <p:txBody>
-          <a:bodyPr wrap="square" lIns="0" rIns="0" tIns="0" bIns="0" anchor="t"/>
+          <a:bodyPr wrap="square" lIns="0" rIns="0" tIns="0" bIns="0" anchor="ctr"/>
           <a:lstStyle/>
           <a:p>
             <a:pPr algn="l">
@@ -5705,21 +5748,488 @@
                 <a:ea typeface="Microsoft YaHei"/>
                 <a:cs typeface="Microsoft YaHei"/>
               </a:rPr>
-              <a:t>Block Manager 与 vLLM 本卡池。另有 YuanRong。</a:t>
-            </a:r>
-          </a:p>
-        </p:txBody>
-      </p:sp>
-      <p:sp>
-        <p:nvSpPr>
-          <p:cNvPr id="49" name="TextBox 48"/>
+              <a:t>对象层。Conductor 只记位置。</a:t>
+            </a:r>
+          </a:p>
+        </p:txBody>
+      </p:sp>
+      <p:sp>
+        <p:nvSpPr>
+          <p:cNvPr id="50" name="Down Arrow 49"/>
+          <p:cNvSpPr/>
+          <p:nvPr/>
+        </p:nvSpPr>
+        <p:spPr>
+          <a:xfrm>
+            <a:off x="6428232" y="3785616"/>
+            <a:ext cx="164592" cy="146304"/>
+          </a:xfrm>
+          <a:prstGeom prst="downArrow">
+            <a:avLst/>
+          </a:prstGeom>
+          <a:solidFill>
+            <a:srgbClr val="145A96"/>
+          </a:solidFill>
+          <a:ln>
+            <a:noFill/>
+          </a:ln>
+        </p:spPr>
+        <p:style>
+          <a:lnRef idx="1">
+            <a:schemeClr val="accent1"/>
+          </a:lnRef>
+          <a:fillRef idx="3">
+            <a:schemeClr val="accent1"/>
+          </a:fillRef>
+          <a:effectRef idx="2">
+            <a:schemeClr val="accent1"/>
+          </a:effectRef>
+          <a:fontRef idx="minor">
+            <a:schemeClr val="lt1"/>
+          </a:fontRef>
+        </p:style>
+        <p:txBody>
+          <a:bodyPr rtlCol="0" anchor="ctr"/>
+          <a:lstStyle/>
+          <a:p>
+            <a:pPr algn="ctr"/>
+          </a:p>
+        </p:txBody>
+      </p:sp>
+      <p:sp>
+        <p:nvSpPr>
+          <p:cNvPr id="51" name="Rectangle 50"/>
+          <p:cNvSpPr/>
+          <p:nvPr/>
+        </p:nvSpPr>
+        <p:spPr>
+          <a:xfrm>
+            <a:off x="4748784" y="3931920"/>
+            <a:ext cx="3523488" cy="420624"/>
+          </a:xfrm>
+          <a:prstGeom prst="rect">
+            <a:avLst/>
+          </a:prstGeom>
+          <a:solidFill>
+            <a:srgbClr val="145A96"/>
+          </a:solidFill>
+          <a:ln>
+            <a:noFill/>
+          </a:ln>
+        </p:spPr>
+        <p:style>
+          <a:lnRef idx="1">
+            <a:schemeClr val="accent1"/>
+          </a:lnRef>
+          <a:fillRef idx="3">
+            <a:schemeClr val="accent1"/>
+          </a:fillRef>
+          <a:effectRef idx="2">
+            <a:schemeClr val="accent1"/>
+          </a:effectRef>
+          <a:fontRef idx="minor">
+            <a:schemeClr val="lt1"/>
+          </a:fontRef>
+        </p:style>
+        <p:txBody>
+          <a:bodyPr rtlCol="0" anchor="ctr"/>
+          <a:lstStyle/>
+          <a:p>
+            <a:pPr algn="ctr"/>
+          </a:p>
+        </p:txBody>
+      </p:sp>
+      <p:sp>
+        <p:nvSpPr>
+          <p:cNvPr id="52" name="TextBox 51"/>
           <p:cNvSpPr txBox="1"/>
           <p:nvPr/>
         </p:nvSpPr>
         <p:spPr>
           <a:xfrm>
-            <a:off x="256032" y="4443984"/>
-            <a:ext cx="841248" cy="585216"/>
+            <a:off x="4821936" y="3950208"/>
+            <a:ext cx="3377184" cy="182880"/>
+          </a:xfrm>
+          <a:prstGeom prst="rect">
+            <a:avLst/>
+          </a:prstGeom>
+          <a:noFill/>
+        </p:spPr>
+        <p:txBody>
+          <a:bodyPr wrap="square" lIns="0" rIns="0" tIns="0" bIns="0" anchor="ctr"/>
+          <a:lstStyle/>
+          <a:p>
+            <a:pPr algn="l">
+              <a:spcBef>
+                <a:spcPts val="0"/>
+              </a:spcBef>
+              <a:spcAft>
+                <a:spcPts val="0"/>
+              </a:spcAft>
+            </a:pPr>
+            <a:r>
+              <a:rPr sz="1300" b="1">
+                <a:solidFill>
+                  <a:srgbClr val="FFFFFF"/>
+                </a:solidFill>
+                <a:latin typeface="Microsoft YaHei"/>
+                <a:ea typeface="Microsoft YaHei"/>
+                <a:cs typeface="Microsoft YaHei"/>
+              </a:rPr>
+              <a:t>传输  HIXL</a:t>
+            </a:r>
+          </a:p>
+        </p:txBody>
+      </p:sp>
+      <p:sp>
+        <p:nvSpPr>
+          <p:cNvPr id="53" name="TextBox 52"/>
+          <p:cNvSpPr txBox="1"/>
+          <p:nvPr/>
+        </p:nvSpPr>
+        <p:spPr>
+          <a:xfrm>
+            <a:off x="4821936" y="4133088"/>
+            <a:ext cx="3377184" cy="201168"/>
+          </a:xfrm>
+          <a:prstGeom prst="rect">
+            <a:avLst/>
+          </a:prstGeom>
+          <a:noFill/>
+        </p:spPr>
+        <p:txBody>
+          <a:bodyPr wrap="square" lIns="0" rIns="0" tIns="0" bIns="0" anchor="ctr"/>
+          <a:lstStyle/>
+          <a:p>
+            <a:pPr algn="l">
+              <a:spcBef>
+                <a:spcPts val="0"/>
+              </a:spcBef>
+              <a:spcAft>
+                <a:spcPts val="0"/>
+              </a:spcAft>
+            </a:pPr>
+            <a:r>
+              <a:rPr sz="1100" b="0">
+                <a:solidFill>
+                  <a:srgbClr val="FFFFFF"/>
+                </a:solidFill>
+                <a:latin typeface="Microsoft YaHei"/>
+                <a:ea typeface="Microsoft YaHei"/>
+                <a:cs typeface="Microsoft YaHei"/>
+              </a:rPr>
+              <a:t>ascend_direct。DataDist 拉推 KV。</a:t>
+            </a:r>
+          </a:p>
+        </p:txBody>
+      </p:sp>
+      <p:sp>
+        <p:nvSpPr>
+          <p:cNvPr id="54" name="Rectangle 53"/>
+          <p:cNvSpPr/>
+          <p:nvPr/>
+        </p:nvSpPr>
+        <p:spPr>
+          <a:xfrm>
+            <a:off x="8363712" y="3401568"/>
+            <a:ext cx="3523488" cy="384048"/>
+          </a:xfrm>
+          <a:prstGeom prst="rect">
+            <a:avLst/>
+          </a:prstGeom>
+          <a:solidFill>
+            <a:srgbClr val="7A541C"/>
+          </a:solidFill>
+          <a:ln>
+            <a:noFill/>
+          </a:ln>
+        </p:spPr>
+        <p:style>
+          <a:lnRef idx="1">
+            <a:schemeClr val="accent1"/>
+          </a:lnRef>
+          <a:fillRef idx="3">
+            <a:schemeClr val="accent1"/>
+          </a:fillRef>
+          <a:effectRef idx="2">
+            <a:schemeClr val="accent1"/>
+          </a:effectRef>
+          <a:fontRef idx="minor">
+            <a:schemeClr val="lt1"/>
+          </a:fontRef>
+        </p:style>
+        <p:txBody>
+          <a:bodyPr rtlCol="0" anchor="ctr"/>
+          <a:lstStyle/>
+          <a:p>
+            <a:pPr algn="ctr"/>
+          </a:p>
+        </p:txBody>
+      </p:sp>
+      <p:sp>
+        <p:nvSpPr>
+          <p:cNvPr id="55" name="TextBox 54"/>
+          <p:cNvSpPr txBox="1"/>
+          <p:nvPr/>
+        </p:nvSpPr>
+        <p:spPr>
+          <a:xfrm>
+            <a:off x="8436864" y="3410712"/>
+            <a:ext cx="3377184" cy="182880"/>
+          </a:xfrm>
+          <a:prstGeom prst="rect">
+            <a:avLst/>
+          </a:prstGeom>
+          <a:noFill/>
+        </p:spPr>
+        <p:txBody>
+          <a:bodyPr wrap="square" lIns="0" rIns="0" tIns="0" bIns="0" anchor="ctr"/>
+          <a:lstStyle/>
+          <a:p>
+            <a:pPr algn="l">
+              <a:spcBef>
+                <a:spcPts val="0"/>
+              </a:spcBef>
+              <a:spcAft>
+                <a:spcPts val="0"/>
+              </a:spcAft>
+            </a:pPr>
+            <a:r>
+              <a:rPr sz="1300" b="1">
+                <a:solidFill>
+                  <a:srgbClr val="FFFFFF"/>
+                </a:solidFill>
+                <a:latin typeface="Microsoft YaHei"/>
+                <a:ea typeface="Microsoft YaHei"/>
+                <a:cs typeface="Microsoft YaHei"/>
+              </a:rPr>
+              <a:t>池  YuanRong</a:t>
+            </a:r>
+          </a:p>
+        </p:txBody>
+      </p:sp>
+      <p:sp>
+        <p:nvSpPr>
+          <p:cNvPr id="56" name="TextBox 55"/>
+          <p:cNvSpPr txBox="1"/>
+          <p:nvPr/>
+        </p:nvSpPr>
+        <p:spPr>
+          <a:xfrm>
+            <a:off x="8436864" y="3593592"/>
+            <a:ext cx="3377184" cy="182880"/>
+          </a:xfrm>
+          <a:prstGeom prst="rect">
+            <a:avLst/>
+          </a:prstGeom>
+          <a:noFill/>
+        </p:spPr>
+        <p:txBody>
+          <a:bodyPr wrap="square" lIns="0" rIns="0" tIns="0" bIns="0" anchor="ctr"/>
+          <a:lstStyle/>
+          <a:p>
+            <a:pPr algn="l">
+              <a:spcBef>
+                <a:spcPts val="0"/>
+              </a:spcBef>
+              <a:spcAft>
+                <a:spcPts val="0"/>
+              </a:spcAft>
+            </a:pPr>
+            <a:r>
+              <a:rPr sz="1100" b="0">
+                <a:solidFill>
+                  <a:srgbClr val="FFFFFF"/>
+                </a:solidFill>
+                <a:latin typeface="Microsoft YaHei"/>
+                <a:ea typeface="Microsoft YaHei"/>
+                <a:cs typeface="Microsoft YaHei"/>
+              </a:rPr>
+              <a:t>第三种 backend。</a:t>
+            </a:r>
+          </a:p>
+        </p:txBody>
+      </p:sp>
+      <p:sp>
+        <p:nvSpPr>
+          <p:cNvPr id="57" name="Down Arrow 56"/>
+          <p:cNvSpPr/>
+          <p:nvPr/>
+        </p:nvSpPr>
+        <p:spPr>
+          <a:xfrm>
+            <a:off x="10043160" y="3785616"/>
+            <a:ext cx="164592" cy="146304"/>
+          </a:xfrm>
+          <a:prstGeom prst="downArrow">
+            <a:avLst/>
+          </a:prstGeom>
+          <a:solidFill>
+            <a:srgbClr val="2E4A6E"/>
+          </a:solidFill>
+          <a:ln>
+            <a:noFill/>
+          </a:ln>
+        </p:spPr>
+        <p:style>
+          <a:lnRef idx="1">
+            <a:schemeClr val="accent1"/>
+          </a:lnRef>
+          <a:fillRef idx="3">
+            <a:schemeClr val="accent1"/>
+          </a:fillRef>
+          <a:effectRef idx="2">
+            <a:schemeClr val="accent1"/>
+          </a:effectRef>
+          <a:fontRef idx="minor">
+            <a:schemeClr val="lt1"/>
+          </a:fontRef>
+        </p:style>
+        <p:txBody>
+          <a:bodyPr rtlCol="0" anchor="ctr"/>
+          <a:lstStyle/>
+          <a:p>
+            <a:pPr algn="ctr"/>
+          </a:p>
+        </p:txBody>
+      </p:sp>
+      <p:sp>
+        <p:nvSpPr>
+          <p:cNvPr id="58" name="Rectangle 57"/>
+          <p:cNvSpPr/>
+          <p:nvPr/>
+        </p:nvSpPr>
+        <p:spPr>
+          <a:xfrm>
+            <a:off x="8363712" y="3931920"/>
+            <a:ext cx="3523488" cy="420624"/>
+          </a:xfrm>
+          <a:prstGeom prst="rect">
+            <a:avLst/>
+          </a:prstGeom>
+          <a:solidFill>
+            <a:srgbClr val="2E4A6E"/>
+          </a:solidFill>
+          <a:ln>
+            <a:noFill/>
+          </a:ln>
+        </p:spPr>
+        <p:style>
+          <a:lnRef idx="1">
+            <a:schemeClr val="accent1"/>
+          </a:lnRef>
+          <a:fillRef idx="3">
+            <a:schemeClr val="accent1"/>
+          </a:fillRef>
+          <a:effectRef idx="2">
+            <a:schemeClr val="accent1"/>
+          </a:effectRef>
+          <a:fontRef idx="minor">
+            <a:schemeClr val="lt1"/>
+          </a:fontRef>
+        </p:style>
+        <p:txBody>
+          <a:bodyPr rtlCol="0" anchor="ctr"/>
+          <a:lstStyle/>
+          <a:p>
+            <a:pPr algn="ctr"/>
+          </a:p>
+        </p:txBody>
+      </p:sp>
+      <p:sp>
+        <p:nvSpPr>
+          <p:cNvPr id="59" name="TextBox 58"/>
+          <p:cNvSpPr txBox="1"/>
+          <p:nvPr/>
+        </p:nvSpPr>
+        <p:spPr>
+          <a:xfrm>
+            <a:off x="8436864" y="3950208"/>
+            <a:ext cx="3377184" cy="182880"/>
+          </a:xfrm>
+          <a:prstGeom prst="rect">
+            <a:avLst/>
+          </a:prstGeom>
+          <a:noFill/>
+        </p:spPr>
+        <p:txBody>
+          <a:bodyPr wrap="square" lIns="0" rIns="0" tIns="0" bIns="0" anchor="ctr"/>
+          <a:lstStyle/>
+          <a:p>
+            <a:pPr algn="l">
+              <a:spcBef>
+                <a:spcPts val="0"/>
+              </a:spcBef>
+              <a:spcAft>
+                <a:spcPts val="0"/>
+              </a:spcAft>
+            </a:pPr>
+            <a:r>
+              <a:rPr sz="1300" b="1">
+                <a:solidFill>
+                  <a:srgbClr val="FFFFFF"/>
+                </a:solidFill>
+                <a:latin typeface="Microsoft YaHei"/>
+                <a:ea typeface="Microsoft YaHei"/>
+                <a:cs typeface="Microsoft YaHei"/>
+              </a:rPr>
+              <a:t>传输  随该后端</a:t>
+            </a:r>
+          </a:p>
+        </p:txBody>
+      </p:sp>
+      <p:sp>
+        <p:nvSpPr>
+          <p:cNvPr id="60" name="TextBox 59"/>
+          <p:cNvSpPr txBox="1"/>
+          <p:nvPr/>
+        </p:nvSpPr>
+        <p:spPr>
+          <a:xfrm>
+            <a:off x="8436864" y="4133088"/>
+            <a:ext cx="3377184" cy="201168"/>
+          </a:xfrm>
+          <a:prstGeom prst="rect">
+            <a:avLst/>
+          </a:prstGeom>
+          <a:noFill/>
+        </p:spPr>
+        <p:txBody>
+          <a:bodyPr wrap="square" lIns="0" rIns="0" tIns="0" bIns="0" anchor="ctr"/>
+          <a:lstStyle/>
+          <a:p>
+            <a:pPr algn="l">
+              <a:spcBef>
+                <a:spcPts val="0"/>
+              </a:spcBef>
+              <a:spcAft>
+                <a:spcPts val="0"/>
+              </a:spcAft>
+            </a:pPr>
+            <a:r>
+              <a:rPr sz="1100" b="0">
+                <a:solidFill>
+                  <a:srgbClr val="FFFFFF"/>
+                </a:solidFill>
+                <a:latin typeface="Microsoft YaHei"/>
+                <a:ea typeface="Microsoft YaHei"/>
+                <a:cs typeface="Microsoft YaHei"/>
+              </a:rPr>
+              <a:t>由 AscendStoreConnector 选定。</a:t>
+            </a:r>
+          </a:p>
+        </p:txBody>
+      </p:sp>
+      <p:sp>
+        <p:nvSpPr>
+          <p:cNvPr id="61" name="TextBox 60"/>
+          <p:cNvSpPr txBox="1"/>
+          <p:nvPr/>
+        </p:nvSpPr>
+        <p:spPr>
+          <a:xfrm>
+            <a:off x="256032" y="4425696"/>
+            <a:ext cx="841248" cy="292608"/>
           </a:xfrm>
           <a:prstGeom prst="rect">
             <a:avLst/>
@@ -5747,21 +6257,21 @@
                 <a:ea typeface="Microsoft YaHei"/>
                 <a:cs typeface="Microsoft YaHei"/>
               </a:rPr>
-              <a:t>通信</a:t>
-            </a:r>
-          </a:p>
-        </p:txBody>
-      </p:sp>
-      <p:sp>
-        <p:nvSpPr>
-          <p:cNvPr id="50" name="Rectangle 49"/>
+              <a:t>集合</a:t>
+            </a:r>
+          </a:p>
+        </p:txBody>
+      </p:sp>
+      <p:sp>
+        <p:nvSpPr>
+          <p:cNvPr id="62" name="Rectangle 61"/>
           <p:cNvSpPr/>
           <p:nvPr/>
         </p:nvSpPr>
         <p:spPr>
           <a:xfrm>
-            <a:off x="1133856" y="4443984"/>
-            <a:ext cx="2633472" cy="585216"/>
+            <a:off x="1133856" y="4425696"/>
+            <a:ext cx="1554480" cy="292608"/>
           </a:xfrm>
           <a:prstGeom prst="rect">
             <a:avLst/>
@@ -5788,34 +6298,10 @@
           </a:fontRef>
         </p:style>
         <p:txBody>
-          <a:bodyPr rtlCol="0" anchor="ctr"/>
-          <a:lstStyle/>
-          <a:p>
-            <a:pPr algn="ctr"/>
-          </a:p>
-        </p:txBody>
-      </p:sp>
-      <p:sp>
-        <p:nvSpPr>
-          <p:cNvPr id="51" name="TextBox 50"/>
-          <p:cNvSpPr txBox="1"/>
-          <p:nvPr/>
-        </p:nvSpPr>
-        <p:spPr>
-          <a:xfrm>
-            <a:off x="1207008" y="4480560"/>
-            <a:ext cx="2487168" cy="219456"/>
-          </a:xfrm>
-          <a:prstGeom prst="rect">
-            <a:avLst/>
-          </a:prstGeom>
-          <a:noFill/>
-        </p:spPr>
-        <p:txBody>
-          <a:bodyPr wrap="square" lIns="0" rIns="0" tIns="0" bIns="0" anchor="ctr"/>
-          <a:lstStyle/>
-          <a:p>
-            <a:pPr algn="l">
+          <a:bodyPr rtlCol="0" anchor="ctr" wrap="square" lIns="54864" rIns="54864" tIns="18288" bIns="18288"/>
+          <a:lstStyle/>
+          <a:p>
+            <a:pPr algn="ctr">
               <a:spcBef>
                 <a:spcPts val="0"/>
               </a:spcBef>
@@ -5839,14 +6325,57 @@
       </p:sp>
       <p:sp>
         <p:nvSpPr>
-          <p:cNvPr id="52" name="TextBox 51"/>
+          <p:cNvPr id="63" name="Rectangle 62"/>
+          <p:cNvSpPr/>
+          <p:nvPr/>
+        </p:nvSpPr>
+        <p:spPr>
+          <a:xfrm>
+            <a:off x="2688336" y="4425696"/>
+            <a:ext cx="9198864" cy="292608"/>
+          </a:xfrm>
+          <a:prstGeom prst="rect">
+            <a:avLst/>
+          </a:prstGeom>
+          <a:solidFill>
+            <a:srgbClr val="145A96"/>
+          </a:solidFill>
+          <a:ln>
+            <a:noFill/>
+          </a:ln>
+        </p:spPr>
+        <p:style>
+          <a:lnRef idx="1">
+            <a:schemeClr val="accent1"/>
+          </a:lnRef>
+          <a:fillRef idx="3">
+            <a:schemeClr val="accent1"/>
+          </a:fillRef>
+          <a:effectRef idx="2">
+            <a:schemeClr val="accent1"/>
+          </a:effectRef>
+          <a:fontRef idx="minor">
+            <a:schemeClr val="lt1"/>
+          </a:fontRef>
+        </p:style>
+        <p:txBody>
+          <a:bodyPr rtlCol="0" anchor="ctr"/>
+          <a:lstStyle/>
+          <a:p>
+            <a:pPr algn="ctr"/>
+          </a:p>
+        </p:txBody>
+      </p:sp>
+      <p:sp>
+        <p:nvSpPr>
+          <p:cNvPr id="64" name="TextBox 63"/>
           <p:cNvSpPr txBox="1"/>
           <p:nvPr/>
         </p:nvSpPr>
         <p:spPr>
           <a:xfrm>
-            <a:off x="1207008" y="4700016"/>
-            <a:ext cx="2487168" cy="292608"/>
+            <a:off x="2798064" y="4425696"/>
+            <a:ext cx="9015984" cy="292608"/>
           </a:xfrm>
           <a:prstGeom prst="rect">
             <a:avLst/>
@@ -5854,7 +6383,7 @@
           <a:noFill/>
         </p:spPr>
         <p:txBody>
-          <a:bodyPr wrap="square" lIns="0" rIns="0" tIns="0" bIns="0" anchor="t"/>
+          <a:bodyPr wrap="square" lIns="0" rIns="0" tIns="0" bIns="0" anchor="ctr"/>
           <a:lstStyle/>
           <a:p>
             <a:pPr algn="l">
@@ -5866,7 +6395,7 @@
               </a:spcAft>
             </a:pPr>
             <a:r>
-              <a:rPr sz="1100" b="0">
+              <a:rPr sz="1300" b="0">
                 <a:solidFill>
                   <a:srgbClr val="FFFFFF"/>
                 </a:solidFill>
@@ -5874,30 +6403,74 @@
                 <a:ea typeface="Microsoft YaHei"/>
                 <a:cs typeface="Microsoft YaHei"/>
               </a:rPr>
-              <a:t>集合通信。服务张量并行和专家并行。</a:t>
-            </a:r>
-          </a:p>
-        </p:txBody>
-      </p:sp>
-      <p:sp>
-        <p:nvSpPr>
-          <p:cNvPr id="53" name="Rectangle 52"/>
+              <a:t>基础库是 HCOMM。服务张量并行与专家并行。</a:t>
+            </a:r>
+          </a:p>
+        </p:txBody>
+      </p:sp>
+      <p:sp>
+        <p:nvSpPr>
+          <p:cNvPr id="65" name="TextBox 64"/>
+          <p:cNvSpPr txBox="1"/>
+          <p:nvPr/>
+        </p:nvSpPr>
+        <p:spPr>
+          <a:xfrm>
+            <a:off x="256032" y="4773168"/>
+            <a:ext cx="841248" cy="402336"/>
+          </a:xfrm>
+          <a:prstGeom prst="rect">
+            <a:avLst/>
+          </a:prstGeom>
+          <a:noFill/>
+        </p:spPr>
+        <p:txBody>
+          <a:bodyPr wrap="square" lIns="0" rIns="0" tIns="0" bIns="0" anchor="ctr"/>
+          <a:lstStyle/>
+          <a:p>
+            <a:pPr algn="l">
+              <a:spcBef>
+                <a:spcPts val="0"/>
+              </a:spcBef>
+              <a:spcAft>
+                <a:spcPts val="0"/>
+              </a:spcAft>
+            </a:pPr>
+            <a:r>
+              <a:rPr sz="1200" b="1">
+                <a:solidFill>
+                  <a:srgbClr val="0E2A47"/>
+                </a:solidFill>
+                <a:latin typeface="Microsoft YaHei"/>
+                <a:ea typeface="Microsoft YaHei"/>
+                <a:cs typeface="Microsoft YaHei"/>
+              </a:rPr>
+              <a:t>算子</a:t>
+            </a:r>
+          </a:p>
+        </p:txBody>
+      </p:sp>
+      <p:sp>
+        <p:nvSpPr>
+          <p:cNvPr id="66" name="Rectangle 65"/>
           <p:cNvSpPr/>
           <p:nvPr/>
         </p:nvSpPr>
         <p:spPr>
           <a:xfrm>
-            <a:off x="3840480" y="4443984"/>
-            <a:ext cx="2633472" cy="585216"/>
+            <a:off x="1133856" y="4773168"/>
+            <a:ext cx="10753344" cy="402336"/>
           </a:xfrm>
           <a:prstGeom prst="rect">
             <a:avLst/>
           </a:prstGeom>
           <a:solidFill>
-            <a:srgbClr val="2E4A6E"/>
+            <a:srgbClr val="FFFFFF"/>
           </a:solidFill>
-          <a:ln>
-            <a:noFill/>
+          <a:ln w="9525">
+            <a:solidFill>
+              <a:srgbClr val="D6DCE2"/>
+            </a:solidFill>
           </a:ln>
         </p:spPr>
         <p:style>
@@ -5924,225 +6497,14 @@
       </p:sp>
       <p:sp>
         <p:nvSpPr>
-          <p:cNvPr id="54" name="TextBox 53"/>
-          <p:cNvSpPr txBox="1"/>
-          <p:nvPr/>
-        </p:nvSpPr>
-        <p:spPr>
-          <a:xfrm>
-            <a:off x="3913632" y="4480560"/>
-            <a:ext cx="2487168" cy="219456"/>
-          </a:xfrm>
-          <a:prstGeom prst="rect">
-            <a:avLst/>
-          </a:prstGeom>
-          <a:noFill/>
-        </p:spPr>
-        <p:txBody>
-          <a:bodyPr wrap="square" lIns="0" rIns="0" tIns="0" bIns="0" anchor="ctr"/>
-          <a:lstStyle/>
-          <a:p>
-            <a:pPr algn="l">
-              <a:spcBef>
-                <a:spcPts val="0"/>
-              </a:spcBef>
-              <a:spcAft>
-                <a:spcPts val="0"/>
-              </a:spcAft>
-            </a:pPr>
-            <a:r>
-              <a:rPr sz="1300" b="1">
-                <a:solidFill>
-                  <a:srgbClr val="FFFFFF"/>
-                </a:solidFill>
-                <a:latin typeface="Microsoft YaHei"/>
-                <a:ea typeface="Microsoft YaHei"/>
-                <a:cs typeface="Microsoft YaHei"/>
-              </a:rPr>
-              <a:t>HCOMM</a:t>
-            </a:r>
-          </a:p>
-        </p:txBody>
-      </p:sp>
-      <p:sp>
-        <p:nvSpPr>
-          <p:cNvPr id="55" name="TextBox 54"/>
-          <p:cNvSpPr txBox="1"/>
-          <p:nvPr/>
-        </p:nvSpPr>
-        <p:spPr>
-          <a:xfrm>
-            <a:off x="3913632" y="4700016"/>
-            <a:ext cx="2487168" cy="292608"/>
-          </a:xfrm>
-          <a:prstGeom prst="rect">
-            <a:avLst/>
-          </a:prstGeom>
-          <a:noFill/>
-        </p:spPr>
-        <p:txBody>
-          <a:bodyPr wrap="square" lIns="0" rIns="0" tIns="0" bIns="0" anchor="t"/>
-          <a:lstStyle/>
-          <a:p>
-            <a:pPr algn="l">
-              <a:spcBef>
-                <a:spcPts val="0"/>
-              </a:spcBef>
-              <a:spcAft>
-                <a:spcPts val="0"/>
-              </a:spcAft>
-            </a:pPr>
-            <a:r>
-              <a:rPr sz="1100" b="0">
-                <a:solidFill>
-                  <a:srgbClr val="FFFFFF"/>
-                </a:solidFill>
-                <a:latin typeface="Microsoft YaHei"/>
-                <a:ea typeface="Microsoft YaHei"/>
-                <a:cs typeface="Microsoft YaHei"/>
-              </a:rPr>
-              <a:t>HCCL 的基础库。控制面与数据面。</a:t>
-            </a:r>
-          </a:p>
-        </p:txBody>
-      </p:sp>
-      <p:sp>
-        <p:nvSpPr>
-          <p:cNvPr id="56" name="Rectangle 55"/>
+          <p:cNvPr id="67" name="Rectangle 66"/>
           <p:cNvSpPr/>
           <p:nvPr/>
         </p:nvSpPr>
         <p:spPr>
           <a:xfrm>
-            <a:off x="6547104" y="4443984"/>
-            <a:ext cx="2633472" cy="585216"/>
-          </a:xfrm>
-          <a:prstGeom prst="rect">
-            <a:avLst/>
-          </a:prstGeom>
-          <a:solidFill>
-            <a:srgbClr val="0E7A76"/>
-          </a:solidFill>
-          <a:ln>
-            <a:noFill/>
-          </a:ln>
-        </p:spPr>
-        <p:style>
-          <a:lnRef idx="1">
-            <a:schemeClr val="accent1"/>
-          </a:lnRef>
-          <a:fillRef idx="3">
-            <a:schemeClr val="accent1"/>
-          </a:fillRef>
-          <a:effectRef idx="2">
-            <a:schemeClr val="accent1"/>
-          </a:effectRef>
-          <a:fontRef idx="minor">
-            <a:schemeClr val="lt1"/>
-          </a:fontRef>
-        </p:style>
-        <p:txBody>
-          <a:bodyPr rtlCol="0" anchor="ctr"/>
-          <a:lstStyle/>
-          <a:p>
-            <a:pPr algn="ctr"/>
-          </a:p>
-        </p:txBody>
-      </p:sp>
-      <p:sp>
-        <p:nvSpPr>
-          <p:cNvPr id="57" name="TextBox 56"/>
-          <p:cNvSpPr txBox="1"/>
-          <p:nvPr/>
-        </p:nvSpPr>
-        <p:spPr>
-          <a:xfrm>
-            <a:off x="6620256" y="4480560"/>
-            <a:ext cx="2487168" cy="219456"/>
-          </a:xfrm>
-          <a:prstGeom prst="rect">
-            <a:avLst/>
-          </a:prstGeom>
-          <a:noFill/>
-        </p:spPr>
-        <p:txBody>
-          <a:bodyPr wrap="square" lIns="0" rIns="0" tIns="0" bIns="0" anchor="ctr"/>
-          <a:lstStyle/>
-          <a:p>
-            <a:pPr algn="l">
-              <a:spcBef>
-                <a:spcPts val="0"/>
-              </a:spcBef>
-              <a:spcAft>
-                <a:spcPts val="0"/>
-              </a:spcAft>
-            </a:pPr>
-            <a:r>
-              <a:rPr sz="1300" b="1">
-                <a:solidFill>
-                  <a:srgbClr val="FFFFFF"/>
-                </a:solidFill>
-                <a:latin typeface="Microsoft YaHei"/>
-                <a:ea typeface="Microsoft YaHei"/>
-                <a:cs typeface="Microsoft YaHei"/>
-              </a:rPr>
-              <a:t>HIXL</a:t>
-            </a:r>
-          </a:p>
-        </p:txBody>
-      </p:sp>
-      <p:sp>
-        <p:nvSpPr>
-          <p:cNvPr id="58" name="TextBox 57"/>
-          <p:cNvSpPr txBox="1"/>
-          <p:nvPr/>
-        </p:nvSpPr>
-        <p:spPr>
-          <a:xfrm>
-            <a:off x="6620256" y="4700016"/>
-            <a:ext cx="2487168" cy="292608"/>
-          </a:xfrm>
-          <a:prstGeom prst="rect">
-            <a:avLst/>
-          </a:prstGeom>
-          <a:noFill/>
-        </p:spPr>
-        <p:txBody>
-          <a:bodyPr wrap="square" lIns="0" rIns="0" tIns="0" bIns="0" anchor="t"/>
-          <a:lstStyle/>
-          <a:p>
-            <a:pPr algn="l">
-              <a:spcBef>
-                <a:spcPts val="0"/>
-              </a:spcBef>
-              <a:spcAft>
-                <a:spcPts val="0"/>
-              </a:spcAft>
-            </a:pPr>
-            <a:r>
-              <a:rPr sz="1100" b="0">
-                <a:solidFill>
-                  <a:srgbClr val="FFFFFF"/>
-                </a:solidFill>
-                <a:latin typeface="Microsoft YaHei"/>
-                <a:ea typeface="Microsoft YaHei"/>
-                <a:cs typeface="Microsoft YaHei"/>
-              </a:rPr>
-              <a:t>单边。LLM-DataDist 拉取和推送 KV。</a:t>
-            </a:r>
-          </a:p>
-        </p:txBody>
-      </p:sp>
-      <p:sp>
-        <p:nvSpPr>
-          <p:cNvPr id="59" name="Rectangle 58"/>
-          <p:cNvSpPr/>
-          <p:nvPr/>
-        </p:nvSpPr>
-        <p:spPr>
-          <a:xfrm>
-            <a:off x="9253728" y="4443984"/>
-            <a:ext cx="2633472" cy="585216"/>
+            <a:off x="1133856" y="4773168"/>
+            <a:ext cx="1554480" cy="402336"/>
           </a:xfrm>
           <a:prstGeom prst="rect">
             <a:avLst/>
@@ -6169,34 +6531,10 @@
           </a:fontRef>
         </p:style>
         <p:txBody>
-          <a:bodyPr rtlCol="0" anchor="ctr"/>
-          <a:lstStyle/>
-          <a:p>
-            <a:pPr algn="ctr"/>
-          </a:p>
-        </p:txBody>
-      </p:sp>
-      <p:sp>
-        <p:nvSpPr>
-          <p:cNvPr id="60" name="TextBox 59"/>
-          <p:cNvSpPr txBox="1"/>
-          <p:nvPr/>
-        </p:nvSpPr>
-        <p:spPr>
-          <a:xfrm>
-            <a:off x="9326880" y="4480560"/>
-            <a:ext cx="2487168" cy="219456"/>
-          </a:xfrm>
-          <a:prstGeom prst="rect">
-            <a:avLst/>
-          </a:prstGeom>
-          <a:noFill/>
-        </p:spPr>
-        <p:txBody>
-          <a:bodyPr wrap="square" lIns="0" rIns="0" tIns="0" bIns="0" anchor="ctr"/>
-          <a:lstStyle/>
-          <a:p>
-            <a:pPr algn="l">
+          <a:bodyPr rtlCol="0" anchor="ctr" wrap="square" lIns="54864" rIns="54864" tIns="18288" bIns="18288"/>
+          <a:lstStyle/>
+          <a:p>
+            <a:pPr algn="ctr">
               <a:spcBef>
                 <a:spcPts val="0"/>
               </a:spcBef>
@@ -6220,14 +6558,14 @@
       </p:sp>
       <p:sp>
         <p:nvSpPr>
-          <p:cNvPr id="61" name="TextBox 60"/>
+          <p:cNvPr id="68" name="TextBox 67"/>
           <p:cNvSpPr txBox="1"/>
           <p:nvPr/>
         </p:nvSpPr>
         <p:spPr>
           <a:xfrm>
-            <a:off x="9326880" y="4700016"/>
-            <a:ext cx="2487168" cy="292608"/>
+            <a:off x="2798064" y="4773168"/>
+            <a:ext cx="8961120" cy="402336"/>
           </a:xfrm>
           <a:prstGeom prst="rect">
             <a:avLst/>
@@ -6235,7 +6573,7 @@
           <a:noFill/>
         </p:spPr>
         <p:txBody>
-          <a:bodyPr wrap="square" lIns="0" rIns="0" tIns="0" bIns="0" anchor="t"/>
+          <a:bodyPr wrap="square" lIns="0" rIns="0" tIns="0" bIns="0" anchor="ctr"/>
           <a:lstStyle/>
           <a:p>
             <a:pPr algn="l">
@@ -6247,29 +6585,29 @@
               </a:spcAft>
             </a:pPr>
             <a:r>
-              <a:rPr sz="1100" b="0">
+              <a:rPr sz="1300" b="0">
                 <a:solidFill>
-                  <a:srgbClr val="FFFFFF"/>
+                  <a:srgbClr val="1C242E"/>
                 </a:solidFill>
                 <a:latin typeface="Microsoft YaHei"/>
                 <a:ea typeface="Microsoft YaHei"/>
                 <a:cs typeface="Microsoft YaHei"/>
               </a:rPr>
-              <a:t>对称内存。卡间单边访问，给定制算子。</a:t>
-            </a:r>
-          </a:p>
-        </p:txBody>
-      </p:sp>
-      <p:sp>
-        <p:nvSpPr>
-          <p:cNvPr id="62" name="TextBox 61"/>
+              <a:t>对称内存，给定制算子。默认的 MindIE / vLLM-Ascend 推理不调用。kv_shuffle 只是示例。</a:t>
+            </a:r>
+          </a:p>
+        </p:txBody>
+      </p:sp>
+      <p:sp>
+        <p:nvSpPr>
+          <p:cNvPr id="69" name="TextBox 68"/>
           <p:cNvSpPr txBox="1"/>
           <p:nvPr/>
         </p:nvSpPr>
         <p:spPr>
           <a:xfrm>
-            <a:off x="256032" y="5120640"/>
-            <a:ext cx="841248" cy="365760"/>
+            <a:off x="256032" y="5248656"/>
+            <a:ext cx="841248" cy="256032"/>
           </a:xfrm>
           <a:prstGeom prst="rect">
             <a:avLst/>
@@ -6289,7 +6627,7 @@
               </a:spcAft>
             </a:pPr>
             <a:r>
-              <a:rPr sz="1300" b="1">
+              <a:rPr sz="1200" b="1">
                 <a:solidFill>
                   <a:srgbClr val="145A96"/>
                 </a:solidFill>
@@ -6304,14 +6642,14 @@
       </p:sp>
       <p:sp>
         <p:nvSpPr>
-          <p:cNvPr id="63" name="Rectangle 62"/>
+          <p:cNvPr id="70" name="Rectangle 69"/>
           <p:cNvSpPr/>
           <p:nvPr/>
         </p:nvSpPr>
         <p:spPr>
           <a:xfrm>
-            <a:off x="1133856" y="5120640"/>
-            <a:ext cx="1554480" cy="365760"/>
+            <a:off x="1133856" y="5248656"/>
+            <a:ext cx="1554480" cy="256032"/>
           </a:xfrm>
           <a:prstGeom prst="rect">
             <a:avLst/>
@@ -6365,14 +6703,14 @@
       </p:sp>
       <p:sp>
         <p:nvSpPr>
-          <p:cNvPr id="64" name="Rectangle 63"/>
+          <p:cNvPr id="71" name="Rectangle 70"/>
           <p:cNvSpPr/>
           <p:nvPr/>
         </p:nvSpPr>
         <p:spPr>
           <a:xfrm>
-            <a:off x="2688336" y="5120640"/>
-            <a:ext cx="9198864" cy="365760"/>
+            <a:off x="2688336" y="5248656"/>
+            <a:ext cx="9198864" cy="256032"/>
           </a:xfrm>
           <a:prstGeom prst="rect">
             <a:avLst/>
@@ -6408,14 +6746,14 @@
       </p:sp>
       <p:sp>
         <p:nvSpPr>
-          <p:cNvPr id="65" name="TextBox 64"/>
+          <p:cNvPr id="72" name="TextBox 71"/>
           <p:cNvSpPr txBox="1"/>
           <p:nvPr/>
         </p:nvSpPr>
         <p:spPr>
           <a:xfrm>
-            <a:off x="2798064" y="5120640"/>
-            <a:ext cx="9015984" cy="365760"/>
+            <a:off x="2798064" y="5248656"/>
+            <a:ext cx="9015984" cy="256032"/>
           </a:xfrm>
           <a:prstGeom prst="rect">
             <a:avLst/>
@@ -6443,21 +6781,21 @@
                 <a:ea typeface="Microsoft YaHei"/>
                 <a:cs typeface="Microsoft YaHei"/>
               </a:rPr>
-              <a:t>AscendCL、GE、Runtime、算子库、DVPP。通信四库也在这一层。推理包是 NNRT。</a:t>
-            </a:r>
-          </a:p>
-        </p:txBody>
-      </p:sp>
-      <p:sp>
-        <p:nvSpPr>
-          <p:cNvPr id="66" name="TextBox 65"/>
+              <a:t>AscendCL、GE、Runtime、算子库、DVPP。推理包是 NNRT。</a:t>
+            </a:r>
+          </a:p>
+        </p:txBody>
+      </p:sp>
+      <p:sp>
+        <p:nvSpPr>
+          <p:cNvPr id="73" name="TextBox 72"/>
           <p:cNvSpPr txBox="1"/>
           <p:nvPr/>
         </p:nvSpPr>
         <p:spPr>
           <a:xfrm>
             <a:off x="256032" y="5541264"/>
-            <a:ext cx="841248" cy="274320"/>
+            <a:ext cx="841248" cy="237744"/>
           </a:xfrm>
           <a:prstGeom prst="rect">
             <a:avLst/>
@@ -6477,7 +6815,7 @@
               </a:spcAft>
             </a:pPr>
             <a:r>
-              <a:rPr sz="1300" b="1">
+              <a:rPr sz="1200" b="1">
                 <a:solidFill>
                   <a:srgbClr val="2E4A6E"/>
                 </a:solidFill>
@@ -6492,14 +6830,14 @@
       </p:sp>
       <p:sp>
         <p:nvSpPr>
-          <p:cNvPr id="67" name="Rectangle 66"/>
+          <p:cNvPr id="74" name="Rectangle 73"/>
           <p:cNvSpPr/>
           <p:nvPr/>
         </p:nvSpPr>
         <p:spPr>
           <a:xfrm>
             <a:off x="1133856" y="5541264"/>
-            <a:ext cx="1554480" cy="274320"/>
+            <a:ext cx="1554480" cy="237744"/>
           </a:xfrm>
           <a:prstGeom prst="rect">
             <a:avLst/>
@@ -6546,21 +6884,21 @@
                 <a:ea typeface="Microsoft YaHei"/>
                 <a:cs typeface="Microsoft YaHei"/>
               </a:rPr>
-              <a:t>HDK / Driver</a:t>
-            </a:r>
-          </a:p>
-        </p:txBody>
-      </p:sp>
-      <p:sp>
-        <p:nvSpPr>
-          <p:cNvPr id="68" name="Rectangle 67"/>
+              <a:t>HDK</a:t>
+            </a:r>
+          </a:p>
+        </p:txBody>
+      </p:sp>
+      <p:sp>
+        <p:nvSpPr>
+          <p:cNvPr id="75" name="Rectangle 74"/>
           <p:cNvSpPr/>
           <p:nvPr/>
         </p:nvSpPr>
         <p:spPr>
           <a:xfrm>
             <a:off x="2688336" y="5541264"/>
-            <a:ext cx="9198864" cy="274320"/>
+            <a:ext cx="9198864" cy="237744"/>
           </a:xfrm>
           <a:prstGeom prst="rect">
             <a:avLst/>
@@ -6596,14 +6934,14 @@
       </p:sp>
       <p:sp>
         <p:nvSpPr>
-          <p:cNvPr id="69" name="TextBox 68"/>
+          <p:cNvPr id="76" name="TextBox 75"/>
           <p:cNvSpPr txBox="1"/>
           <p:nvPr/>
         </p:nvSpPr>
         <p:spPr>
           <a:xfrm>
             <a:off x="2798064" y="5541264"/>
-            <a:ext cx="9015984" cy="274320"/>
+            <a:ext cx="9015984" cy="237744"/>
           </a:xfrm>
           <a:prstGeom prst="rect">
             <a:avLst/>
@@ -6638,14 +6976,14 @@
       </p:sp>
       <p:sp>
         <p:nvSpPr>
-          <p:cNvPr id="70" name="TextBox 69"/>
+          <p:cNvPr id="77" name="TextBox 76"/>
           <p:cNvSpPr txBox="1"/>
           <p:nvPr/>
         </p:nvSpPr>
         <p:spPr>
           <a:xfrm>
-            <a:off x="256032" y="5870448"/>
-            <a:ext cx="841248" cy="274320"/>
+            <a:off x="256032" y="5815584"/>
+            <a:ext cx="841248" cy="237744"/>
           </a:xfrm>
           <a:prstGeom prst="rect">
             <a:avLst/>
@@ -6665,7 +7003,7 @@
               </a:spcAft>
             </a:pPr>
             <a:r>
-              <a:rPr sz="1300" b="1">
+              <a:rPr sz="1200" b="1">
                 <a:solidFill>
                   <a:srgbClr val="0E2A47"/>
                 </a:solidFill>
@@ -6680,14 +7018,14 @@
       </p:sp>
       <p:sp>
         <p:nvSpPr>
-          <p:cNvPr id="71" name="Rectangle 70"/>
+          <p:cNvPr id="78" name="Rectangle 77"/>
           <p:cNvSpPr/>
           <p:nvPr/>
         </p:nvSpPr>
         <p:spPr>
           <a:xfrm>
-            <a:off x="1133856" y="5870448"/>
-            <a:ext cx="1554480" cy="274320"/>
+            <a:off x="1133856" y="5815584"/>
+            <a:ext cx="1554480" cy="237744"/>
           </a:xfrm>
           <a:prstGeom prst="rect">
             <a:avLst/>
@@ -6734,21 +7072,21 @@
                 <a:ea typeface="Microsoft YaHei"/>
                 <a:cs typeface="Microsoft YaHei"/>
               </a:rPr>
-              <a:t>昇腾 NPU</a:t>
-            </a:r>
-          </a:p>
-        </p:txBody>
-      </p:sp>
-      <p:sp>
-        <p:nvSpPr>
-          <p:cNvPr id="72" name="Rectangle 71"/>
+              <a:t>NPU</a:t>
+            </a:r>
+          </a:p>
+        </p:txBody>
+      </p:sp>
+      <p:sp>
+        <p:nvSpPr>
+          <p:cNvPr id="79" name="Rectangle 78"/>
           <p:cNvSpPr/>
           <p:nvPr/>
         </p:nvSpPr>
         <p:spPr>
           <a:xfrm>
-            <a:off x="2688336" y="5870448"/>
-            <a:ext cx="9198864" cy="274320"/>
+            <a:off x="2688336" y="5815584"/>
+            <a:ext cx="9198864" cy="237744"/>
           </a:xfrm>
           <a:prstGeom prst="rect">
             <a:avLst/>
@@ -6784,14 +7122,14 @@
       </p:sp>
       <p:sp>
         <p:nvSpPr>
-          <p:cNvPr id="73" name="TextBox 72"/>
+          <p:cNvPr id="80" name="TextBox 79"/>
           <p:cNvSpPr txBox="1"/>
           <p:nvPr/>
         </p:nvSpPr>
         <p:spPr>
           <a:xfrm>
-            <a:off x="2798064" y="5870448"/>
-            <a:ext cx="9015984" cy="274320"/>
+            <a:off x="2798064" y="5815584"/>
+            <a:ext cx="9015984" cy="237744"/>
           </a:xfrm>
           <a:prstGeom prst="rect">
             <a:avLst/>
@@ -6826,14 +7164,14 @@
       </p:sp>
       <p:sp>
         <p:nvSpPr>
-          <p:cNvPr id="74" name="TextBox 73"/>
+          <p:cNvPr id="81" name="TextBox 80"/>
           <p:cNvSpPr txBox="1"/>
           <p:nvPr/>
         </p:nvSpPr>
         <p:spPr>
           <a:xfrm>
-            <a:off x="292608" y="6199632"/>
-            <a:ext cx="11612880" cy="530352"/>
+            <a:off x="292608" y="6108192"/>
+            <a:ext cx="11612880" cy="658368"/>
           </a:xfrm>
           <a:prstGeom prst="rect">
             <a:avLst/>
@@ -6861,7 +7199,7 @@
                 <a:ea typeface="Microsoft YaHei"/>
                 <a:cs typeface="Microsoft YaHei"/>
               </a:rPr>
-              <a:t>HCCL 走集合，服务模型并行。HIXL 走单边，服务 P 到 D 的 KV。按层池化目前只在 MemCache 上。</a:t>
+              <a:t>按层池化当前只接 MemCache。Conductor 只记位置，字节不经过它。HIXL 覆盖 D2D、D2H、H2D。</a:t>
             </a:r>
           </a:p>
           <a:p>
@@ -6882,7 +7220,7 @@
                 <a:ea typeface="Microsoft YaHei"/>
                 <a:cs typeface="Microsoft YaHei"/>
               </a:rPr>
-              <a:t>HCOMM 是文档里的通信基础库名。MemCache、Mooncake、YuanRong 是池后端，不是三条调用链。</a:t>
+              <a:t>MindIE 进程间的 /dev/shm 是主机共享内存里的标志位，和 CANN SHMEM 是两套。文档里的库名是 HCOMM。</a:t>
             </a:r>
           </a:p>
         </p:txBody>

--- a/docs/ascend-infer-stack.pptx
+++ b/docs/ascend-infer-stack.pptx
@@ -502,7 +502,7 @@
           <a:lstStyle/>
           <a:p>
             <a:r>
-              <a:t>依据 MindIE 3.1 用户手册 Overview 与 MindIE Motor 3.1 架构说明。MindIE LLM 进入维护，官方建议新部署使用 MindIE Motor 加 vLLM-Ascend。MindIE LLM 自上而下为 Server、LLM Manager、Text Generator、Modeling。LLM Manager 内的 Engine 编排 Scheduler、Executor 和 Worker；Block Manager 管 KV 池。Executor 把调度结果下发给 Text Generator，覆盖跨节点、跨设备。Text Generator 含前处理、Generator、Sampler，并支持可插拔的并行解码。Modeling 提供 ATB Models；开发者架构说明同时支持 ACLGraph 和 ATBGraph。Motor：Coordinator 为数据面入口；Controller 与 NodeManager 为管控面；EngineServer 北向接二者，南向当前仅 vLLM。架构页写明南向接口包括 vLLM、SGLang 和 MindIE，当前版本只支持 vLLM。MindCluster 提供 Kubernetes、PD 分离 CRD 和 Operator，位于调用链外侧。CCAE 可选。CANN 组成沿用方案概述：AscendCL、GE、Runtime、算子库、HCCL、DVPP。推理运行包为 NNRT。KV 池与传输不是并列关系。AscendStoreConnector.backend 在 memcache、mooncake、yuanrong 里选一个池。MemCache 是 Motor 3.1 默认池：MetaService 管元数据，LocalService 管 DRAM。它的字节走 MemFabric，协议有 device_rdma（A2）、device_sdma（A3）、host_rdma、device_urma（950）、同节点 host_shm。Mooncake 是对象层，mooncake_master 管池。昇腾上的字节走 Ascend Direct（adxl），建在 CANN 的 HIXL 上。ASCEND_USE_ASYNC_TRANSFER 打开 HIXL 异步传输。LLM-DataDist 是 HIXL 上的 KV 接口，做链路和 pull、push，覆盖 D2D、D2H、H2D。Conductor 只是位置索引，Coordinator 用它做亲和调度，字节不经过 Conductor。YuanRong 是第三种池后端。按层池化目前只支持 MemCache。HCCL 是集合通信，服务张量并行和专家并行。HCOMM 是 HCCL 的基础库，控制面管拓扑和资源，数据面管搬运和同步。用户所说的 HCOM 对应文档名 HCOMM。CANN SHMEM（aclshmem）是算子用的对称内存。仓库示例 kv_shuffle 做跨 PE 的 KV 块拷贝，不在默认服务路径上。MindIE 的 SharedMemCommunication 和 layerwise 的 share_memory 使用主机 POSIX 共享内存传控制标志，不是 CANN SHMEM。</a:t>
+              <a:t>依据 MindIE 3.1 用户手册 Overview 与 MindIE Motor 3.1 架构说明。MindIE LLM 进入维护，官方建议新部署使用 MindIE Motor 加 vLLM-Ascend。MindIE LLM 自上而下为 Server、LLM Manager、Text Generator、Modeling。LLM Manager 内的 Engine 编排 Scheduler、Executor 和 Worker；Block Manager 管 KV 池。Executor 把调度结果下发给 Text Generator，覆盖跨节点、跨设备。Text Generator 含前处理、Generator、Sampler，并支持可插拔的并行解码。Modeling 提供 ATB Models；开发者架构说明同时支持 ACLGraph 和 ATBGraph。Motor：Coordinator 为数据面入口；Controller 与 NodeManager 为管控面；EngineServer 北向接二者，南向当前仅 vLLM。架构页写明南向接口包括 vLLM、SGLang 和 MindIE，当前版本只支持 vLLM。MindCluster 提供 Kubernetes、PD 分离 CRD 和 Operator，位于调用链外侧。CCAE 可选。CANN 组成沿用方案概述：AscendCL、GE、Runtime、算子库、HCCL、DVPP。推理运行包为 NNRT。KV 池与传输不是并列关系。AscendStoreConnector.backend 在 memcache、mooncake、yuanrong 里选一个池。MemCache 是 Motor 3.1 默认池：MetaService 管元数据，LocalService 管 DRAM。它的字节走 MemFabric，协议有 device_rdma（A2）、device_sdma（A3）、host_rdma、device_urma（950）、同节点 host_shm。MemFabric 与 HIXL 并列。memfabric_hybrid 源码中没有 hixl。device_rdma 自己建 QP，经 HCCP 的 RaSendWrV2 下发；打开设备时调用 HCCL 的 HcclCommInitClusterInfoMemConfig 取得 RDMA handle。device_sdma 走 ACL 与 HAL。host_rdma、host_tcp、host_urma 走 openEuler ubs-comm 的 libhcom.so，符号前缀是 ubs_hcom_。Mooncake 是对象层，mooncake_master 管池。昇腾上的字节走 Ascend Direct（adxl），建在 CANN 的 HIXL 上。ASCEND_USE_ASYNC_TRANSFER 打开 HIXL 异步传输。LLM-DataDist 是 HIXL 上的 KV 接口，做链路和 pull、push，覆盖 D2D、D2H、H2D。HIXL 的 FabricMem 模式由 OPTION_ENABLE_USE_FABRIC_MEM 打开，vLLM-Ascend 对应环境变量 ASCEND_ENABLE_USE_FABRIC_MEM。它是 HIXL 内部用于 A3 超节点 HCCS 上 D2RH、RH2D 的选项，不是 MemFabric 这个库。Conductor 只是位置索引，Coordinator 用它做亲和调度，字节不经过 Conductor。YuanRong 是第三种池后端。按层池化目前只支持 MemCache。HCCL 是集合通信，服务张量并行和专家并行。HCOMM 是 HCCL 的基础库，库文件 libhcomm.so，控制面管拓扑和资源，数据面管搬运和同步。用户所说的 HCOM 在 CANN 文档里对应 HCOMM。MemFabric 主机侧的 libhcom.so 来自 ubs-comm，是另一套库。CANN SHMEM（aclshmem）是算子用的对称内存。仓库示例 kv_shuffle 做跨 PE 的 KV 块拷贝，不在默认服务路径上。MindIE 的 SharedMemCommunication 和 layerwise 的 share_memory 使用主机 POSIX 共享内存传控制标志，不是 CANN SHMEM。</a:t>
             </a:r>
           </a:p>
         </p:txBody>
@@ -5621,7 +5621,7 @@
                 <a:ea typeface="Microsoft YaHei"/>
                 <a:cs typeface="Microsoft YaHei"/>
               </a:rPr>
-              <a:t>rdma、sdma、urma、host_shm。</a:t>
+              <a:t>与 HIXL 并列。rdma 经 HCCP。</a:t>
             </a:r>
           </a:p>
         </p:txBody>
